--- a/KHBD_Tin_học/Lớp_5/Tuần_02/Slide_Tin_hoc_Lop_5_Bai01_Em_co_the_lam_gi_voi_may_tinh.pptx
+++ b/KHBD_Tin_học/Lớp_5/Tuần_02/Slide_Tin_hoc_Lop_5_Bai01_Em_co_the_lam_gi_voi_may_tinh.pptx
@@ -3389,6 +3389,12 @@
 <p:sld xmlns:a="http://schemas.openxmlformats.org/drawingml/2006/main" xmlns:p="http://schemas.openxmlformats.org/presentationml/2006/main" xmlns:r="http://schemas.openxmlformats.org/officeDocument/2006/relationships">
   <p:cSld>
     <p:spTree>
+      <p:nvGrpSpPr>
+        <p:cNvPr id="1" name=""/>
+        <p:cNvGrpSpPr/>
+        <p:nvPr/>
+      </p:nvGrpSpPr>
+      <p:grpSpPr/>
       <p:sp>
         <p:nvSpPr>
           <p:cNvPr id="3" name="Rectangle 2"/>
@@ -3475,12 +3481,6 @@
           </a:p>
         </p:txBody>
       </p:sp>
-      <p:nvGrpSpPr>
-        <p:cNvPr id="1" name=""/>
-        <p:cNvGrpSpPr/>
-        <p:nvPr/>
-      </p:nvGrpSpPr>
-      <p:grpSpPr/>
       <p:sp>
         <p:nvSpPr>
           <p:cNvPr id="4" name="TextBox 3"/>
@@ -3590,6 +3590,12 @@
 <p:sld xmlns:a="http://schemas.openxmlformats.org/drawingml/2006/main" xmlns:p="http://schemas.openxmlformats.org/presentationml/2006/main" xmlns:r="http://schemas.openxmlformats.org/officeDocument/2006/relationships">
   <p:cSld>
     <p:spTree>
+      <p:nvGrpSpPr>
+        <p:cNvPr id="1" name=""/>
+        <p:cNvGrpSpPr/>
+        <p:nvPr/>
+      </p:nvGrpSpPr>
+      <p:grpSpPr/>
       <p:sp>
         <p:nvSpPr>
           <p:cNvPr id="2" name="Rectangle 1"/>
@@ -3633,12 +3639,6 @@
           </a:p>
         </p:txBody>
       </p:sp>
-      <p:nvGrpSpPr>
-        <p:cNvPr id="1" name=""/>
-        <p:cNvGrpSpPr/>
-        <p:nvPr/>
-      </p:nvGrpSpPr>
-      <p:grpSpPr/>
       <p:sp>
         <p:nvSpPr>
           <p:cNvPr id="3" name="Rectangle 2"/>
@@ -3964,6 +3964,12 @@
 <p:sld xmlns:a="http://schemas.openxmlformats.org/drawingml/2006/main" xmlns:p="http://schemas.openxmlformats.org/presentationml/2006/main" xmlns:r="http://schemas.openxmlformats.org/officeDocument/2006/relationships">
   <p:cSld>
     <p:spTree>
+      <p:nvGrpSpPr>
+        <p:cNvPr id="1" name=""/>
+        <p:cNvGrpSpPr/>
+        <p:nvPr/>
+      </p:nvGrpSpPr>
+      <p:grpSpPr/>
       <p:sp>
         <p:nvSpPr>
           <p:cNvPr id="2" name="Rectangle 1"/>
@@ -4007,12 +4013,6 @@
           </a:p>
         </p:txBody>
       </p:sp>
-      <p:nvGrpSpPr>
-        <p:cNvPr id="1" name=""/>
-        <p:cNvGrpSpPr/>
-        <p:nvPr/>
-      </p:nvGrpSpPr>
-      <p:grpSpPr/>
       <p:sp>
         <p:nvSpPr>
           <p:cNvPr id="3" name="Rectangle 2"/>
@@ -4354,6 +4354,12 @@
 <p:sld xmlns:a="http://schemas.openxmlformats.org/drawingml/2006/main" xmlns:p="http://schemas.openxmlformats.org/presentationml/2006/main" xmlns:r="http://schemas.openxmlformats.org/officeDocument/2006/relationships">
   <p:cSld>
     <p:spTree>
+      <p:nvGrpSpPr>
+        <p:cNvPr id="1" name=""/>
+        <p:cNvGrpSpPr/>
+        <p:nvPr/>
+      </p:nvGrpSpPr>
+      <p:grpSpPr/>
       <p:sp>
         <p:nvSpPr>
           <p:cNvPr id="2" name="Rectangle 1"/>
@@ -4397,12 +4403,6 @@
           </a:p>
         </p:txBody>
       </p:sp>
-      <p:nvGrpSpPr>
-        <p:cNvPr id="1" name=""/>
-        <p:cNvGrpSpPr/>
-        <p:nvPr/>
-      </p:nvGrpSpPr>
-      <p:grpSpPr/>
       <p:sp>
         <p:nvSpPr>
           <p:cNvPr id="3" name="Rectangle 2"/>
@@ -4744,6 +4744,12 @@
 <p:sld xmlns:a="http://schemas.openxmlformats.org/drawingml/2006/main" xmlns:p="http://schemas.openxmlformats.org/presentationml/2006/main" xmlns:r="http://schemas.openxmlformats.org/officeDocument/2006/relationships">
   <p:cSld>
     <p:spTree>
+      <p:nvGrpSpPr>
+        <p:cNvPr id="1" name=""/>
+        <p:cNvGrpSpPr/>
+        <p:nvPr/>
+      </p:nvGrpSpPr>
+      <p:grpSpPr/>
       <p:sp>
         <p:nvSpPr>
           <p:cNvPr id="2" name="Rectangle 1"/>
@@ -4787,12 +4793,6 @@
           </a:p>
         </p:txBody>
       </p:sp>
-      <p:nvGrpSpPr>
-        <p:cNvPr id="1" name=""/>
-        <p:cNvGrpSpPr/>
-        <p:nvPr/>
-      </p:nvGrpSpPr>
-      <p:grpSpPr/>
       <p:sp>
         <p:nvSpPr>
           <p:cNvPr id="3" name="Rectangle 2"/>
@@ -5134,6 +5134,12 @@
 <p:sld xmlns:a="http://schemas.openxmlformats.org/drawingml/2006/main" xmlns:p="http://schemas.openxmlformats.org/presentationml/2006/main" xmlns:r="http://schemas.openxmlformats.org/officeDocument/2006/relationships">
   <p:cSld>
     <p:spTree>
+      <p:nvGrpSpPr>
+        <p:cNvPr id="1" name=""/>
+        <p:cNvGrpSpPr/>
+        <p:nvPr/>
+      </p:nvGrpSpPr>
+      <p:grpSpPr/>
       <p:sp>
         <p:nvSpPr>
           <p:cNvPr id="2" name="Rectangle 1"/>
@@ -5177,12 +5183,6 @@
           </a:p>
         </p:txBody>
       </p:sp>
-      <p:nvGrpSpPr>
-        <p:cNvPr id="1" name=""/>
-        <p:cNvGrpSpPr/>
-        <p:nvPr/>
-      </p:nvGrpSpPr>
-      <p:grpSpPr/>
       <p:sp>
         <p:nvSpPr>
           <p:cNvPr id="3" name="Rectangle 2"/>
@@ -5398,6 +5398,12 @@
 <p:sld xmlns:a="http://schemas.openxmlformats.org/drawingml/2006/main" xmlns:p="http://schemas.openxmlformats.org/presentationml/2006/main" xmlns:r="http://schemas.openxmlformats.org/officeDocument/2006/relationships">
   <p:cSld>
     <p:spTree>
+      <p:nvGrpSpPr>
+        <p:cNvPr id="1" name=""/>
+        <p:cNvGrpSpPr/>
+        <p:nvPr/>
+      </p:nvGrpSpPr>
+      <p:grpSpPr/>
       <p:sp>
         <p:nvSpPr>
           <p:cNvPr id="2" name="Rectangle 1"/>
@@ -5441,12 +5447,6 @@
           </a:p>
         </p:txBody>
       </p:sp>
-      <p:nvGrpSpPr>
-        <p:cNvPr id="1" name=""/>
-        <p:cNvGrpSpPr/>
-        <p:nvPr/>
-      </p:nvGrpSpPr>
-      <p:grpSpPr/>
       <p:sp>
         <p:nvSpPr>
           <p:cNvPr id="3" name="Rectangle 2"/>
@@ -5934,6 +5934,12 @@
 <p:sld xmlns:a="http://schemas.openxmlformats.org/drawingml/2006/main" xmlns:p="http://schemas.openxmlformats.org/presentationml/2006/main" xmlns:r="http://schemas.openxmlformats.org/officeDocument/2006/relationships">
   <p:cSld>
     <p:spTree>
+      <p:nvGrpSpPr>
+        <p:cNvPr id="1" name=""/>
+        <p:cNvGrpSpPr/>
+        <p:nvPr/>
+      </p:nvGrpSpPr>
+      <p:grpSpPr/>
       <p:sp>
         <p:nvSpPr>
           <p:cNvPr id="2" name="Rectangle 1"/>
@@ -5977,12 +5983,6 @@
           </a:p>
         </p:txBody>
       </p:sp>
-      <p:nvGrpSpPr>
-        <p:cNvPr id="1" name=""/>
-        <p:cNvGrpSpPr/>
-        <p:nvPr/>
-      </p:nvGrpSpPr>
-      <p:grpSpPr/>
       <p:sp>
         <p:nvSpPr>
           <p:cNvPr id="3" name="Rounded Rectangle 2"/>
@@ -6525,6 +6525,12 @@
 <p:sld xmlns:a="http://schemas.openxmlformats.org/drawingml/2006/main" xmlns:p="http://schemas.openxmlformats.org/presentationml/2006/main" xmlns:r="http://schemas.openxmlformats.org/officeDocument/2006/relationships">
   <p:cSld>
     <p:spTree>
+      <p:nvGrpSpPr>
+        <p:cNvPr id="1" name=""/>
+        <p:cNvGrpSpPr/>
+        <p:nvPr/>
+      </p:nvGrpSpPr>
+      <p:grpSpPr/>
       <p:sp>
         <p:nvSpPr>
           <p:cNvPr id="2" name="Rectangle 1"/>
@@ -6568,12 +6574,6 @@
           </a:p>
         </p:txBody>
       </p:sp>
-      <p:nvGrpSpPr>
-        <p:cNvPr id="1" name=""/>
-        <p:cNvGrpSpPr/>
-        <p:nvPr/>
-      </p:nvGrpSpPr>
-      <p:grpSpPr/>
       <p:sp>
         <p:nvSpPr>
           <p:cNvPr id="3" name="TextBox 2"/>

--- a/KHBD_Tin_học/Lớp_5/Tuần_02/Slide_Tin_hoc_Lop_5_Bai01_Em_co_the_lam_gi_voi_may_tinh.pptx
+++ b/KHBD_Tin_học/Lớp_5/Tuần_02/Slide_Tin_hoc_Lop_5_Bai01_Em_co_the_lam_gi_voi_may_tinh.pptx
@@ -3489,8 +3489,8 @@
         </p:nvSpPr>
         <p:spPr>
           <a:xfrm>
-            <a:off x="1371600" y="2011680"/>
-            <a:ext cx="9445752" cy="1371600"/>
+            <a:off x="731520" y="1828800"/>
+            <a:ext cx="6858000" cy="1371600"/>
           </a:xfrm>
           <a:prstGeom prst="rect">
             <a:avLst/>
@@ -3503,9 +3503,9 @@
           </a:bodyPr>
           <a:lstStyle/>
           <a:p>
-            <a:pPr algn="ctr"/>
-            <a:r>
-              <a:rPr sz="3600" b="1">
+            <a:pPr algn="l"/>
+            <a:r>
+              <a:rPr sz="3400" b="1">
                 <a:solidFill>
                   <a:srgbClr val="FFFFFF"/>
                 </a:solidFill>
@@ -3524,8 +3524,8 @@
         </p:nvSpPr>
         <p:spPr>
           <a:xfrm>
-            <a:off x="1371600" y="3657600"/>
-            <a:ext cx="9445752" cy="731520"/>
+            <a:off x="731520" y="3474720"/>
+            <a:ext cx="6858000" cy="731520"/>
           </a:xfrm>
           <a:prstGeom prst="rect">
             <a:avLst/>
@@ -3538,7 +3538,7 @@
           </a:bodyPr>
           <a:lstStyle/>
           <a:p>
-            <a:pPr algn="ctr"/>
+            <a:pPr algn="l"/>
             <a:r>
               <a:rPr sz="2000" b="0">
                 <a:solidFill>
@@ -3726,7 +3726,7 @@
         <p:spPr>
           <a:xfrm>
             <a:off x="457200" y="1600200"/>
-            <a:ext cx="11274552" cy="594360"/>
+            <a:ext cx="7315200" cy="594360"/>
           </a:xfrm>
           <a:prstGeom prst="rect">
             <a:avLst/>
@@ -3846,8 +3846,8 @@
         </p:nvSpPr>
         <p:spPr>
           <a:xfrm>
-            <a:off x="731520" y="2423160"/>
-            <a:ext cx="6309360" cy="3108960"/>
+            <a:off x="731520" y="2468880"/>
+            <a:ext cx="6309360" cy="3017520"/>
           </a:xfrm>
           <a:prstGeom prst="rect">
             <a:avLst/>
@@ -3866,13 +3866,13 @@
               </a:spcAft>
             </a:pPr>
             <a:r>
-              <a:rPr sz="1800" b="0">
+              <a:rPr sz="2000" b="0">
                 <a:solidFill>
                   <a:srgbClr val="831843"/>
                 </a:solidFill>
                 <a:latin typeface="Arial"/>
               </a:rPr>
-              <a:t>Tuần trước em đã dùng máy tính để làm gì?</a:t>
+              <a:t>Tuần trước em đã dùng máy tính để làm những việc gì?</a:t>
             </a:r>
           </a:p>
           <a:p>
@@ -3882,45 +3882,13 @@
               </a:spcAft>
             </a:pPr>
             <a:r>
-              <a:rPr sz="1800" b="0">
+              <a:rPr sz="2000" b="0">
                 <a:solidFill>
                   <a:srgbClr val="831843"/>
                 </a:solidFill>
                 <a:latin typeface="Arial"/>
               </a:rPr>
-              <a:t>Kể ít nhất 2 việc nhé!</a:t>
-            </a:r>
-          </a:p>
-          <a:p>
-            <a:pPr algn="l">
-              <a:spcAft>
-                <a:spcPts val="600"/>
-              </a:spcAft>
-            </a:pPr>
-            <a:r>
-              <a:rPr sz="1800" b="0">
-                <a:solidFill>
-                  <a:srgbClr val="831843"/>
-                </a:solidFill>
-                <a:latin typeface="Arial"/>
-              </a:rPr>
-              <a:t/>
-            </a:r>
-          </a:p>
-          <a:p>
-            <a:pPr algn="l">
-              <a:spcAft>
-                <a:spcPts val="600"/>
-              </a:spcAft>
-            </a:pPr>
-            <a:r>
-              <a:rPr sz="1800" b="0">
-                <a:solidFill>
-                  <a:srgbClr val="831843"/>
-                </a:solidFill>
-                <a:latin typeface="Arial"/>
-              </a:rPr>
-              <a:t>Gợi ý: Học bài? Xem video? Chơi game? Tìm kiếm?</a:t>
+              <a:t>Kể ít nhất 2 việc cụ thể nhé!</a:t>
             </a:r>
           </a:p>
         </p:txBody>
@@ -4134,8 +4102,8 @@
         </p:nvSpPr>
         <p:spPr>
           <a:xfrm>
-            <a:off x="365760" y="2286000"/>
-            <a:ext cx="6858000" cy="3383279"/>
+            <a:off x="457200" y="2331720"/>
+            <a:ext cx="5522976" cy="1600200"/>
           </a:xfrm>
           <a:prstGeom prst="roundRect">
             <a:avLst/>
@@ -4143,8 +4111,10 @@
           <a:solidFill>
             <a:srgbClr val="FFFFFF"/>
           </a:solidFill>
-          <a:ln>
-            <a:noFill/>
+          <a:ln w="12700">
+            <a:solidFill>
+              <a:srgbClr val="D0D5DD"/>
+            </a:solidFill>
           </a:ln>
         </p:spPr>
         <p:style>
@@ -4177,8 +4147,8 @@
         </p:nvSpPr>
         <p:spPr>
           <a:xfrm>
-            <a:off x="365760" y="2286000"/>
-            <a:ext cx="109728" cy="3383279"/>
+            <a:off x="457200" y="2331720"/>
+            <a:ext cx="5522976" cy="91440"/>
           </a:xfrm>
           <a:prstGeom prst="rect">
             <a:avLst/>
@@ -4212,112 +4182,9 @@
           </a:p>
         </p:txBody>
       </p:sp>
-      <p:sp>
-        <p:nvSpPr>
-          <p:cNvPr id="8" name="TextBox 7"/>
-          <p:cNvSpPr txBox="1"/>
-          <p:nvPr/>
-        </p:nvSpPr>
-        <p:spPr>
-          <a:xfrm>
-            <a:off x="731520" y="2423160"/>
-            <a:ext cx="6309360" cy="3108960"/>
-          </a:xfrm>
-          <a:prstGeom prst="rect">
-            <a:avLst/>
-          </a:prstGeom>
-          <a:noFill/>
-        </p:spPr>
-        <p:txBody>
-          <a:bodyPr wrap="square">
-            <a:spAutoFit/>
-          </a:bodyPr>
-          <a:lstStyle/>
-          <a:p>
-            <a:pPr algn="l">
-              <a:spcAft>
-                <a:spcPts val="600"/>
-              </a:spcAft>
-            </a:pPr>
-            <a:r>
-              <a:rPr sz="1800" b="0">
-                <a:solidFill>
-                  <a:srgbClr val="831843"/>
-                </a:solidFill>
-                <a:latin typeface="Arial"/>
-              </a:rPr>
-              <a:t>Với máy tính, em có thể:</a:t>
-            </a:r>
-          </a:p>
-          <a:p>
-            <a:pPr algn="l">
-              <a:spcAft>
-                <a:spcPts val="600"/>
-              </a:spcAft>
-            </a:pPr>
-            <a:r>
-              <a:rPr sz="1800" b="0">
-                <a:solidFill>
-                  <a:srgbClr val="831843"/>
-                </a:solidFill>
-                <a:latin typeface="Arial"/>
-              </a:rPr>
-              <a:t>● Soạn thảo văn bản (Word)</a:t>
-            </a:r>
-          </a:p>
-          <a:p>
-            <a:pPr algn="l">
-              <a:spcAft>
-                <a:spcPts val="600"/>
-              </a:spcAft>
-            </a:pPr>
-            <a:r>
-              <a:rPr sz="1800" b="0">
-                <a:solidFill>
-                  <a:srgbClr val="831843"/>
-                </a:solidFill>
-                <a:latin typeface="Arial"/>
-              </a:rPr>
-              <a:t>● Tính toán bằng bảng tính (Excel)</a:t>
-            </a:r>
-          </a:p>
-          <a:p>
-            <a:pPr algn="l">
-              <a:spcAft>
-                <a:spcPts val="600"/>
-              </a:spcAft>
-            </a:pPr>
-            <a:r>
-              <a:rPr sz="1800" b="0">
-                <a:solidFill>
-                  <a:srgbClr val="831843"/>
-                </a:solidFill>
-                <a:latin typeface="Arial"/>
-              </a:rPr>
-              <a:t>● Vẽ tranh và thiết kế (Paint, Canva)</a:t>
-            </a:r>
-          </a:p>
-          <a:p>
-            <a:pPr algn="l">
-              <a:spcAft>
-                <a:spcPts val="600"/>
-              </a:spcAft>
-            </a:pPr>
-            <a:r>
-              <a:rPr sz="1800" b="0">
-                <a:solidFill>
-                  <a:srgbClr val="831843"/>
-                </a:solidFill>
-                <a:latin typeface="Arial"/>
-              </a:rPr>
-              <a:t>● Thuyết trình (PowerPoint)</a:t>
-            </a:r>
-          </a:p>
-        </p:txBody>
-      </p:sp>
       <p:pic>
         <p:nvPicPr>
-          <p:cNvPr id="9" name="Picture 8" descr="bai1_p11_img1.jpeg"/>
+          <p:cNvPr id="8" name="Picture 7" descr="bai1_p10_img1.jpeg"/>
           <p:cNvPicPr>
             <a:picLocks noChangeAspect="1"/>
           </p:cNvPicPr>
@@ -4331,21 +4198,497 @@
         </p:blipFill>
         <p:spPr>
           <a:xfrm>
-            <a:off x="7589520" y="2286000"/>
-            <a:ext cx="4114799" cy="3383279"/>
+            <a:off x="2395728" y="2468879"/>
+            <a:ext cx="1645920" cy="1005840"/>
           </a:xfrm>
           <a:prstGeom prst="rect">
             <a:avLst/>
           </a:prstGeom>
         </p:spPr>
       </p:pic>
+      <p:sp>
+        <p:nvSpPr>
+          <p:cNvPr id="9" name="TextBox 8"/>
+          <p:cNvSpPr txBox="1"/>
+          <p:nvPr/>
+        </p:nvSpPr>
+        <p:spPr>
+          <a:xfrm>
+            <a:off x="594360" y="3474720"/>
+            <a:ext cx="5248656" cy="457200"/>
+          </a:xfrm>
+          <a:prstGeom prst="rect">
+            <a:avLst/>
+          </a:prstGeom>
+          <a:noFill/>
+        </p:spPr>
+        <p:txBody>
+          <a:bodyPr wrap="square">
+            <a:spAutoFit/>
+          </a:bodyPr>
+          <a:lstStyle/>
+          <a:p>
+            <a:pPr algn="ctr"/>
+            <a:r>
+              <a:rPr sz="1600" b="0">
+                <a:solidFill>
+                  <a:srgbClr val="831843"/>
+                </a:solidFill>
+                <a:latin typeface="Arial"/>
+              </a:rPr>
+              <a:t>Soạn thảo văn bản và bài viết (Word)</a:t>
+            </a:r>
+          </a:p>
+        </p:txBody>
+      </p:sp>
+      <p:sp>
+        <p:nvSpPr>
+          <p:cNvPr id="10" name="Rounded Rectangle 9"/>
+          <p:cNvSpPr/>
+          <p:nvPr/>
+        </p:nvSpPr>
+        <p:spPr>
+          <a:xfrm>
+            <a:off x="6208776" y="2331720"/>
+            <a:ext cx="5522976" cy="1600200"/>
+          </a:xfrm>
+          <a:prstGeom prst="roundRect">
+            <a:avLst/>
+          </a:prstGeom>
+          <a:solidFill>
+            <a:srgbClr val="FFFFFF"/>
+          </a:solidFill>
+          <a:ln w="12700">
+            <a:solidFill>
+              <a:srgbClr val="D0D5DD"/>
+            </a:solidFill>
+          </a:ln>
+        </p:spPr>
+        <p:style>
+          <a:lnRef idx="1">
+            <a:schemeClr val="accent1"/>
+          </a:lnRef>
+          <a:fillRef idx="3">
+            <a:schemeClr val="accent1"/>
+          </a:fillRef>
+          <a:effectRef idx="2">
+            <a:schemeClr val="accent1"/>
+          </a:effectRef>
+          <a:fontRef idx="minor">
+            <a:schemeClr val="lt1"/>
+          </a:fontRef>
+        </p:style>
+        <p:txBody>
+          <a:bodyPr rtlCol="0" anchor="ctr"/>
+          <a:lstStyle/>
+          <a:p>
+            <a:pPr algn="ctr"/>
+          </a:p>
+        </p:txBody>
+      </p:sp>
+      <p:sp>
+        <p:nvSpPr>
+          <p:cNvPr id="11" name="Rectangle 10"/>
+          <p:cNvSpPr/>
+          <p:nvPr/>
+        </p:nvSpPr>
+        <p:spPr>
+          <a:xfrm>
+            <a:off x="6208776" y="2331720"/>
+            <a:ext cx="5522976" cy="91440"/>
+          </a:xfrm>
+          <a:prstGeom prst="rect">
+            <a:avLst/>
+          </a:prstGeom>
+          <a:solidFill>
+            <a:srgbClr val="EC4899"/>
+          </a:solidFill>
+          <a:ln>
+            <a:noFill/>
+          </a:ln>
+        </p:spPr>
+        <p:style>
+          <a:lnRef idx="1">
+            <a:schemeClr val="accent1"/>
+          </a:lnRef>
+          <a:fillRef idx="3">
+            <a:schemeClr val="accent1"/>
+          </a:fillRef>
+          <a:effectRef idx="2">
+            <a:schemeClr val="accent1"/>
+          </a:effectRef>
+          <a:fontRef idx="minor">
+            <a:schemeClr val="lt1"/>
+          </a:fontRef>
+        </p:style>
+        <p:txBody>
+          <a:bodyPr rtlCol="0" anchor="ctr"/>
+          <a:lstStyle/>
+          <a:p>
+            <a:pPr algn="ctr"/>
+          </a:p>
+        </p:txBody>
+      </p:sp>
+      <p:pic>
+        <p:nvPicPr>
+          <p:cNvPr id="12" name="Picture 11" descr="bai1_p11_img1.jpeg"/>
+          <p:cNvPicPr>
+            <a:picLocks noChangeAspect="1"/>
+          </p:cNvPicPr>
+          <p:nvPr/>
+        </p:nvPicPr>
+        <p:blipFill>
+          <a:blip r:embed="rId3"/>
+          <a:stretch>
+            <a:fillRect/>
+          </a:stretch>
+        </p:blipFill>
+        <p:spPr>
+          <a:xfrm>
+            <a:off x="8147304" y="2468879"/>
+            <a:ext cx="1645920" cy="1005840"/>
+          </a:xfrm>
+          <a:prstGeom prst="rect">
+            <a:avLst/>
+          </a:prstGeom>
+        </p:spPr>
+      </p:pic>
+      <p:sp>
+        <p:nvSpPr>
+          <p:cNvPr id="13" name="TextBox 12"/>
+          <p:cNvSpPr txBox="1"/>
+          <p:nvPr/>
+        </p:nvSpPr>
+        <p:spPr>
+          <a:xfrm>
+            <a:off x="6345936" y="3474720"/>
+            <a:ext cx="5248656" cy="457200"/>
+          </a:xfrm>
+          <a:prstGeom prst="rect">
+            <a:avLst/>
+          </a:prstGeom>
+          <a:noFill/>
+        </p:spPr>
+        <p:txBody>
+          <a:bodyPr wrap="square">
+            <a:spAutoFit/>
+          </a:bodyPr>
+          <a:lstStyle/>
+          <a:p>
+            <a:pPr algn="ctr"/>
+            <a:r>
+              <a:rPr sz="1600" b="0">
+                <a:solidFill>
+                  <a:srgbClr val="831843"/>
+                </a:solidFill>
+                <a:latin typeface="Arial"/>
+              </a:rPr>
+              <a:t>Tính toán và xử lý số liệu (Excel)</a:t>
+            </a:r>
+          </a:p>
+        </p:txBody>
+      </p:sp>
+      <p:sp>
+        <p:nvSpPr>
+          <p:cNvPr id="14" name="Rounded Rectangle 13"/>
+          <p:cNvSpPr/>
+          <p:nvPr/>
+        </p:nvSpPr>
+        <p:spPr>
+          <a:xfrm>
+            <a:off x="457200" y="4160520"/>
+            <a:ext cx="5522976" cy="1600200"/>
+          </a:xfrm>
+          <a:prstGeom prst="roundRect">
+            <a:avLst/>
+          </a:prstGeom>
+          <a:solidFill>
+            <a:srgbClr val="FFFFFF"/>
+          </a:solidFill>
+          <a:ln w="12700">
+            <a:solidFill>
+              <a:srgbClr val="D0D5DD"/>
+            </a:solidFill>
+          </a:ln>
+        </p:spPr>
+        <p:style>
+          <a:lnRef idx="1">
+            <a:schemeClr val="accent1"/>
+          </a:lnRef>
+          <a:fillRef idx="3">
+            <a:schemeClr val="accent1"/>
+          </a:fillRef>
+          <a:effectRef idx="2">
+            <a:schemeClr val="accent1"/>
+          </a:effectRef>
+          <a:fontRef idx="minor">
+            <a:schemeClr val="lt1"/>
+          </a:fontRef>
+        </p:style>
+        <p:txBody>
+          <a:bodyPr rtlCol="0" anchor="ctr"/>
+          <a:lstStyle/>
+          <a:p>
+            <a:pPr algn="ctr"/>
+          </a:p>
+        </p:txBody>
+      </p:sp>
+      <p:sp>
+        <p:nvSpPr>
+          <p:cNvPr id="15" name="Rectangle 14"/>
+          <p:cNvSpPr/>
+          <p:nvPr/>
+        </p:nvSpPr>
+        <p:spPr>
+          <a:xfrm>
+            <a:off x="457200" y="4160520"/>
+            <a:ext cx="5522976" cy="91440"/>
+          </a:xfrm>
+          <a:prstGeom prst="rect">
+            <a:avLst/>
+          </a:prstGeom>
+          <a:solidFill>
+            <a:srgbClr val="EC4899"/>
+          </a:solidFill>
+          <a:ln>
+            <a:noFill/>
+          </a:ln>
+        </p:spPr>
+        <p:style>
+          <a:lnRef idx="1">
+            <a:schemeClr val="accent1"/>
+          </a:lnRef>
+          <a:fillRef idx="3">
+            <a:schemeClr val="accent1"/>
+          </a:fillRef>
+          <a:effectRef idx="2">
+            <a:schemeClr val="accent1"/>
+          </a:effectRef>
+          <a:fontRef idx="minor">
+            <a:schemeClr val="lt1"/>
+          </a:fontRef>
+        </p:style>
+        <p:txBody>
+          <a:bodyPr rtlCol="0" anchor="ctr"/>
+          <a:lstStyle/>
+          <a:p>
+            <a:pPr algn="ctr"/>
+          </a:p>
+        </p:txBody>
+      </p:sp>
+      <p:pic>
+        <p:nvPicPr>
+          <p:cNvPr id="16" name="Picture 15" descr="bai1_p12_img1.jpeg"/>
+          <p:cNvPicPr>
+            <a:picLocks noChangeAspect="1"/>
+          </p:cNvPicPr>
+          <p:nvPr/>
+        </p:nvPicPr>
+        <p:blipFill>
+          <a:blip r:embed="rId4"/>
+          <a:stretch>
+            <a:fillRect/>
+          </a:stretch>
+        </p:blipFill>
+        <p:spPr>
+          <a:xfrm>
+            <a:off x="2395728" y="4297680"/>
+            <a:ext cx="1645920" cy="1005840"/>
+          </a:xfrm>
+          <a:prstGeom prst="rect">
+            <a:avLst/>
+          </a:prstGeom>
+        </p:spPr>
+      </p:pic>
+      <p:sp>
+        <p:nvSpPr>
+          <p:cNvPr id="17" name="TextBox 16"/>
+          <p:cNvSpPr txBox="1"/>
+          <p:nvPr/>
+        </p:nvSpPr>
+        <p:spPr>
+          <a:xfrm>
+            <a:off x="594360" y="5303520"/>
+            <a:ext cx="5248656" cy="457200"/>
+          </a:xfrm>
+          <a:prstGeom prst="rect">
+            <a:avLst/>
+          </a:prstGeom>
+          <a:noFill/>
+        </p:spPr>
+        <p:txBody>
+          <a:bodyPr wrap="square">
+            <a:spAutoFit/>
+          </a:bodyPr>
+          <a:lstStyle/>
+          <a:p>
+            <a:pPr algn="ctr"/>
+            <a:r>
+              <a:rPr sz="1600" b="0">
+                <a:solidFill>
+                  <a:srgbClr val="831843"/>
+                </a:solidFill>
+                <a:latin typeface="Arial"/>
+              </a:rPr>
+              <a:t>Thiết kế tranh ảnh và sơ đồ (Paint, Canva)</a:t>
+            </a:r>
+          </a:p>
+        </p:txBody>
+      </p:sp>
+      <p:sp>
+        <p:nvSpPr>
+          <p:cNvPr id="18" name="Rounded Rectangle 17"/>
+          <p:cNvSpPr/>
+          <p:nvPr/>
+        </p:nvSpPr>
+        <p:spPr>
+          <a:xfrm>
+            <a:off x="6208776" y="4160520"/>
+            <a:ext cx="5522976" cy="1600200"/>
+          </a:xfrm>
+          <a:prstGeom prst="roundRect">
+            <a:avLst/>
+          </a:prstGeom>
+          <a:solidFill>
+            <a:srgbClr val="FFFFFF"/>
+          </a:solidFill>
+          <a:ln w="12700">
+            <a:solidFill>
+              <a:srgbClr val="D0D5DD"/>
+            </a:solidFill>
+          </a:ln>
+        </p:spPr>
+        <p:style>
+          <a:lnRef idx="1">
+            <a:schemeClr val="accent1"/>
+          </a:lnRef>
+          <a:fillRef idx="3">
+            <a:schemeClr val="accent1"/>
+          </a:fillRef>
+          <a:effectRef idx="2">
+            <a:schemeClr val="accent1"/>
+          </a:effectRef>
+          <a:fontRef idx="minor">
+            <a:schemeClr val="lt1"/>
+          </a:fontRef>
+        </p:style>
+        <p:txBody>
+          <a:bodyPr rtlCol="0" anchor="ctr"/>
+          <a:lstStyle/>
+          <a:p>
+            <a:pPr algn="ctr"/>
+          </a:p>
+        </p:txBody>
+      </p:sp>
+      <p:sp>
+        <p:nvSpPr>
+          <p:cNvPr id="19" name="Rectangle 18"/>
+          <p:cNvSpPr/>
+          <p:nvPr/>
+        </p:nvSpPr>
+        <p:spPr>
+          <a:xfrm>
+            <a:off x="6208776" y="4160520"/>
+            <a:ext cx="5522976" cy="91440"/>
+          </a:xfrm>
+          <a:prstGeom prst="rect">
+            <a:avLst/>
+          </a:prstGeom>
+          <a:solidFill>
+            <a:srgbClr val="EC4899"/>
+          </a:solidFill>
+          <a:ln>
+            <a:noFill/>
+          </a:ln>
+        </p:spPr>
+        <p:style>
+          <a:lnRef idx="1">
+            <a:schemeClr val="accent1"/>
+          </a:lnRef>
+          <a:fillRef idx="3">
+            <a:schemeClr val="accent1"/>
+          </a:fillRef>
+          <a:effectRef idx="2">
+            <a:schemeClr val="accent1"/>
+          </a:effectRef>
+          <a:fontRef idx="minor">
+            <a:schemeClr val="lt1"/>
+          </a:fontRef>
+        </p:style>
+        <p:txBody>
+          <a:bodyPr rtlCol="0" anchor="ctr"/>
+          <a:lstStyle/>
+          <a:p>
+            <a:pPr algn="ctr"/>
+          </a:p>
+        </p:txBody>
+      </p:sp>
+      <p:pic>
+        <p:nvPicPr>
+          <p:cNvPr id="20" name="Picture 19" descr="bai1_p13_img1.jpeg"/>
+          <p:cNvPicPr>
+            <a:picLocks noChangeAspect="1"/>
+          </p:cNvPicPr>
+          <p:nvPr/>
+        </p:nvPicPr>
+        <p:blipFill>
+          <a:blip r:embed="rId5"/>
+          <a:stretch>
+            <a:fillRect/>
+          </a:stretch>
+        </p:blipFill>
+        <p:spPr>
+          <a:xfrm>
+            <a:off x="8147304" y="4297680"/>
+            <a:ext cx="1645920" cy="1005840"/>
+          </a:xfrm>
+          <a:prstGeom prst="rect">
+            <a:avLst/>
+          </a:prstGeom>
+        </p:spPr>
+      </p:pic>
+      <p:sp>
+        <p:nvSpPr>
+          <p:cNvPr id="21" name="TextBox 20"/>
+          <p:cNvSpPr txBox="1"/>
+          <p:nvPr/>
+        </p:nvSpPr>
+        <p:spPr>
+          <a:xfrm>
+            <a:off x="6345936" y="5303520"/>
+            <a:ext cx="5248656" cy="457200"/>
+          </a:xfrm>
+          <a:prstGeom prst="rect">
+            <a:avLst/>
+          </a:prstGeom>
+          <a:noFill/>
+        </p:spPr>
+        <p:txBody>
+          <a:bodyPr wrap="square">
+            <a:spAutoFit/>
+          </a:bodyPr>
+          <a:lstStyle/>
+          <a:p>
+            <a:pPr algn="ctr"/>
+            <a:r>
+              <a:rPr sz="1600" b="0">
+                <a:solidFill>
+                  <a:srgbClr val="831843"/>
+                </a:solidFill>
+                <a:latin typeface="Arial"/>
+              </a:rPr>
+              <a:t>Tạo bài trình chiếu sinh động (PowerPoint)</a:t>
+            </a:r>
+          </a:p>
+        </p:txBody>
+      </p:sp>
     </p:spTree>
   </p:cSld>
   <p:clrMapOvr>
     <a:masterClrMapping/>
   </p:clrMapOvr>
   <p:transition spd="med">
-    <p:push dir="l"/>
+    <p:wipe/>
   </p:transition>
 </p:sld>
 </file>
@@ -4511,7 +4854,7 @@
                 </a:solidFill>
                 <a:latin typeface="Arial"/>
               </a:rPr>
-              <a:t>Kết nối và chia sẻ!</a:t>
+              <a:t>Kết nối và chia sẻ tri thức!</a:t>
             </a:r>
           </a:p>
         </p:txBody>
@@ -4524,8 +4867,8 @@
         </p:nvSpPr>
         <p:spPr>
           <a:xfrm>
-            <a:off x="365760" y="2286000"/>
-            <a:ext cx="6858000" cy="3383279"/>
+            <a:off x="457200" y="2628900"/>
+            <a:ext cx="3605784" cy="2788920"/>
           </a:xfrm>
           <a:prstGeom prst="roundRect">
             <a:avLst/>
@@ -4533,8 +4876,10 @@
           <a:solidFill>
             <a:srgbClr val="FFFFFF"/>
           </a:solidFill>
-          <a:ln>
-            <a:noFill/>
+          <a:ln w="12700">
+            <a:solidFill>
+              <a:srgbClr val="D0D5DD"/>
+            </a:solidFill>
           </a:ln>
         </p:spPr>
         <p:style>
@@ -4567,8 +4912,8 @@
         </p:nvSpPr>
         <p:spPr>
           <a:xfrm>
-            <a:off x="365760" y="2286000"/>
-            <a:ext cx="109728" cy="3383279"/>
+            <a:off x="457200" y="2628900"/>
+            <a:ext cx="3605784" cy="91440"/>
           </a:xfrm>
           <a:prstGeom prst="rect">
             <a:avLst/>
@@ -4602,112 +4947,9 @@
           </a:p>
         </p:txBody>
       </p:sp>
-      <p:sp>
-        <p:nvSpPr>
-          <p:cNvPr id="8" name="TextBox 7"/>
-          <p:cNvSpPr txBox="1"/>
-          <p:nvPr/>
-        </p:nvSpPr>
-        <p:spPr>
-          <a:xfrm>
-            <a:off x="731520" y="2423160"/>
-            <a:ext cx="6309360" cy="3108960"/>
-          </a:xfrm>
-          <a:prstGeom prst="rect">
-            <a:avLst/>
-          </a:prstGeom>
-          <a:noFill/>
-        </p:spPr>
-        <p:txBody>
-          <a:bodyPr wrap="square">
-            <a:spAutoFit/>
-          </a:bodyPr>
-          <a:lstStyle/>
-          <a:p>
-            <a:pPr algn="l">
-              <a:spcAft>
-                <a:spcPts val="600"/>
-              </a:spcAft>
-            </a:pPr>
-            <a:r>
-              <a:rPr sz="1800" b="0">
-                <a:solidFill>
-                  <a:srgbClr val="831843"/>
-                </a:solidFill>
-                <a:latin typeface="Arial"/>
-              </a:rPr>
-              <a:t>Nhờ Internet, em có thể:</a:t>
-            </a:r>
-          </a:p>
-          <a:p>
-            <a:pPr algn="l">
-              <a:spcAft>
-                <a:spcPts val="600"/>
-              </a:spcAft>
-            </a:pPr>
-            <a:r>
-              <a:rPr sz="1800" b="0">
-                <a:solidFill>
-                  <a:srgbClr val="831843"/>
-                </a:solidFill>
-                <a:latin typeface="Arial"/>
-              </a:rPr>
-              <a:t>● Tìm kiếm thông tin (Google)</a:t>
-            </a:r>
-          </a:p>
-          <a:p>
-            <a:pPr algn="l">
-              <a:spcAft>
-                <a:spcPts val="600"/>
-              </a:spcAft>
-            </a:pPr>
-            <a:r>
-              <a:rPr sz="1800" b="0">
-                <a:solidFill>
-                  <a:srgbClr val="831843"/>
-                </a:solidFill>
-                <a:latin typeface="Arial"/>
-              </a:rPr>
-              <a:t>● Gửi email cho thầy cô</a:t>
-            </a:r>
-          </a:p>
-          <a:p>
-            <a:pPr algn="l">
-              <a:spcAft>
-                <a:spcPts val="600"/>
-              </a:spcAft>
-            </a:pPr>
-            <a:r>
-              <a:rPr sz="1800" b="0">
-                <a:solidFill>
-                  <a:srgbClr val="831843"/>
-                </a:solidFill>
-                <a:latin typeface="Arial"/>
-              </a:rPr>
-              <a:t>● Học trực tuyến (Zoom, Google Meet)</a:t>
-            </a:r>
-          </a:p>
-          <a:p>
-            <a:pPr algn="l">
-              <a:spcAft>
-                <a:spcPts val="600"/>
-              </a:spcAft>
-            </a:pPr>
-            <a:r>
-              <a:rPr sz="1800" b="0">
-                <a:solidFill>
-                  <a:srgbClr val="831843"/>
-                </a:solidFill>
-                <a:latin typeface="Arial"/>
-              </a:rPr>
-              <a:t>● Chia sẻ bài với bạn bè</a:t>
-            </a:r>
-          </a:p>
-        </p:txBody>
-      </p:sp>
       <p:pic>
         <p:nvPicPr>
-          <p:cNvPr id="9" name="Picture 8" descr="bai1_p11_img1.jpeg"/>
+          <p:cNvPr id="8" name="Picture 7" descr="bai1_p13_img1.jpeg"/>
           <p:cNvPicPr>
             <a:picLocks noChangeAspect="1"/>
           </p:cNvPicPr>
@@ -4721,14 +4963,343 @@
         </p:blipFill>
         <p:spPr>
           <a:xfrm>
-            <a:off x="7589520" y="2286000"/>
-            <a:ext cx="4114799" cy="3383279"/>
+            <a:off x="1437132" y="2766060"/>
+            <a:ext cx="1645920" cy="1828800"/>
           </a:xfrm>
           <a:prstGeom prst="rect">
             <a:avLst/>
           </a:prstGeom>
         </p:spPr>
       </p:pic>
+      <p:sp>
+        <p:nvSpPr>
+          <p:cNvPr id="9" name="TextBox 8"/>
+          <p:cNvSpPr txBox="1"/>
+          <p:nvPr/>
+        </p:nvSpPr>
+        <p:spPr>
+          <a:xfrm>
+            <a:off x="594360" y="4594860"/>
+            <a:ext cx="3331464" cy="822960"/>
+          </a:xfrm>
+          <a:prstGeom prst="rect">
+            <a:avLst/>
+          </a:prstGeom>
+          <a:noFill/>
+        </p:spPr>
+        <p:txBody>
+          <a:bodyPr wrap="square">
+            <a:spAutoFit/>
+          </a:bodyPr>
+          <a:lstStyle/>
+          <a:p>
+            <a:pPr algn="ctr"/>
+            <a:r>
+              <a:rPr sz="1600" b="0">
+                <a:solidFill>
+                  <a:srgbClr val="831843"/>
+                </a:solidFill>
+                <a:latin typeface="Arial"/>
+              </a:rPr>
+              <a:t>Tìm kiếm thông tin học tập trên Google</a:t>
+            </a:r>
+          </a:p>
+        </p:txBody>
+      </p:sp>
+      <p:sp>
+        <p:nvSpPr>
+          <p:cNvPr id="10" name="Rounded Rectangle 9"/>
+          <p:cNvSpPr/>
+          <p:nvPr/>
+        </p:nvSpPr>
+        <p:spPr>
+          <a:xfrm>
+            <a:off x="4291584" y="2628900"/>
+            <a:ext cx="3605784" cy="2788920"/>
+          </a:xfrm>
+          <a:prstGeom prst="roundRect">
+            <a:avLst/>
+          </a:prstGeom>
+          <a:solidFill>
+            <a:srgbClr val="FFFFFF"/>
+          </a:solidFill>
+          <a:ln w="12700">
+            <a:solidFill>
+              <a:srgbClr val="D0D5DD"/>
+            </a:solidFill>
+          </a:ln>
+        </p:spPr>
+        <p:style>
+          <a:lnRef idx="1">
+            <a:schemeClr val="accent1"/>
+          </a:lnRef>
+          <a:fillRef idx="3">
+            <a:schemeClr val="accent1"/>
+          </a:fillRef>
+          <a:effectRef idx="2">
+            <a:schemeClr val="accent1"/>
+          </a:effectRef>
+          <a:fontRef idx="minor">
+            <a:schemeClr val="lt1"/>
+          </a:fontRef>
+        </p:style>
+        <p:txBody>
+          <a:bodyPr rtlCol="0" anchor="ctr"/>
+          <a:lstStyle/>
+          <a:p>
+            <a:pPr algn="ctr"/>
+          </a:p>
+        </p:txBody>
+      </p:sp>
+      <p:sp>
+        <p:nvSpPr>
+          <p:cNvPr id="11" name="Rectangle 10"/>
+          <p:cNvSpPr/>
+          <p:nvPr/>
+        </p:nvSpPr>
+        <p:spPr>
+          <a:xfrm>
+            <a:off x="4291584" y="2628900"/>
+            <a:ext cx="3605784" cy="91440"/>
+          </a:xfrm>
+          <a:prstGeom prst="rect">
+            <a:avLst/>
+          </a:prstGeom>
+          <a:solidFill>
+            <a:srgbClr val="EC4899"/>
+          </a:solidFill>
+          <a:ln>
+            <a:noFill/>
+          </a:ln>
+        </p:spPr>
+        <p:style>
+          <a:lnRef idx="1">
+            <a:schemeClr val="accent1"/>
+          </a:lnRef>
+          <a:fillRef idx="3">
+            <a:schemeClr val="accent1"/>
+          </a:fillRef>
+          <a:effectRef idx="2">
+            <a:schemeClr val="accent1"/>
+          </a:effectRef>
+          <a:fontRef idx="minor">
+            <a:schemeClr val="lt1"/>
+          </a:fontRef>
+        </p:style>
+        <p:txBody>
+          <a:bodyPr rtlCol="0" anchor="ctr"/>
+          <a:lstStyle/>
+          <a:p>
+            <a:pPr algn="ctr"/>
+          </a:p>
+        </p:txBody>
+      </p:sp>
+      <p:pic>
+        <p:nvPicPr>
+          <p:cNvPr id="12" name="Picture 11" descr="bai1_p6_img1.jpeg"/>
+          <p:cNvPicPr>
+            <a:picLocks noChangeAspect="1"/>
+          </p:cNvPicPr>
+          <p:nvPr/>
+        </p:nvPicPr>
+        <p:blipFill>
+          <a:blip r:embed="rId3"/>
+          <a:stretch>
+            <a:fillRect/>
+          </a:stretch>
+        </p:blipFill>
+        <p:spPr>
+          <a:xfrm>
+            <a:off x="5271516" y="2766060"/>
+            <a:ext cx="1645920" cy="1828800"/>
+          </a:xfrm>
+          <a:prstGeom prst="rect">
+            <a:avLst/>
+          </a:prstGeom>
+        </p:spPr>
+      </p:pic>
+      <p:sp>
+        <p:nvSpPr>
+          <p:cNvPr id="13" name="TextBox 12"/>
+          <p:cNvSpPr txBox="1"/>
+          <p:nvPr/>
+        </p:nvSpPr>
+        <p:spPr>
+          <a:xfrm>
+            <a:off x="4428744" y="4594860"/>
+            <a:ext cx="3331464" cy="822960"/>
+          </a:xfrm>
+          <a:prstGeom prst="rect">
+            <a:avLst/>
+          </a:prstGeom>
+          <a:noFill/>
+        </p:spPr>
+        <p:txBody>
+          <a:bodyPr wrap="square">
+            <a:spAutoFit/>
+          </a:bodyPr>
+          <a:lstStyle/>
+          <a:p>
+            <a:pPr algn="ctr"/>
+            <a:r>
+              <a:rPr sz="1600" b="0">
+                <a:solidFill>
+                  <a:srgbClr val="831843"/>
+                </a:solidFill>
+                <a:latin typeface="Arial"/>
+              </a:rPr>
+              <a:t>Gửi thư điện tử Email trao đổi bài</a:t>
+            </a:r>
+          </a:p>
+        </p:txBody>
+      </p:sp>
+      <p:sp>
+        <p:nvSpPr>
+          <p:cNvPr id="14" name="Rounded Rectangle 13"/>
+          <p:cNvSpPr/>
+          <p:nvPr/>
+        </p:nvSpPr>
+        <p:spPr>
+          <a:xfrm>
+            <a:off x="8125968" y="2628900"/>
+            <a:ext cx="3605784" cy="2788920"/>
+          </a:xfrm>
+          <a:prstGeom prst="roundRect">
+            <a:avLst/>
+          </a:prstGeom>
+          <a:solidFill>
+            <a:srgbClr val="FFFFFF"/>
+          </a:solidFill>
+          <a:ln w="12700">
+            <a:solidFill>
+              <a:srgbClr val="D0D5DD"/>
+            </a:solidFill>
+          </a:ln>
+        </p:spPr>
+        <p:style>
+          <a:lnRef idx="1">
+            <a:schemeClr val="accent1"/>
+          </a:lnRef>
+          <a:fillRef idx="3">
+            <a:schemeClr val="accent1"/>
+          </a:fillRef>
+          <a:effectRef idx="2">
+            <a:schemeClr val="accent1"/>
+          </a:effectRef>
+          <a:fontRef idx="minor">
+            <a:schemeClr val="lt1"/>
+          </a:fontRef>
+        </p:style>
+        <p:txBody>
+          <a:bodyPr rtlCol="0" anchor="ctr"/>
+          <a:lstStyle/>
+          <a:p>
+            <a:pPr algn="ctr"/>
+          </a:p>
+        </p:txBody>
+      </p:sp>
+      <p:sp>
+        <p:nvSpPr>
+          <p:cNvPr id="15" name="Rectangle 14"/>
+          <p:cNvSpPr/>
+          <p:nvPr/>
+        </p:nvSpPr>
+        <p:spPr>
+          <a:xfrm>
+            <a:off x="8125968" y="2628900"/>
+            <a:ext cx="3605784" cy="91440"/>
+          </a:xfrm>
+          <a:prstGeom prst="rect">
+            <a:avLst/>
+          </a:prstGeom>
+          <a:solidFill>
+            <a:srgbClr val="EC4899"/>
+          </a:solidFill>
+          <a:ln>
+            <a:noFill/>
+          </a:ln>
+        </p:spPr>
+        <p:style>
+          <a:lnRef idx="1">
+            <a:schemeClr val="accent1"/>
+          </a:lnRef>
+          <a:fillRef idx="3">
+            <a:schemeClr val="accent1"/>
+          </a:fillRef>
+          <a:effectRef idx="2">
+            <a:schemeClr val="accent1"/>
+          </a:effectRef>
+          <a:fontRef idx="minor">
+            <a:schemeClr val="lt1"/>
+          </a:fontRef>
+        </p:style>
+        <p:txBody>
+          <a:bodyPr rtlCol="0" anchor="ctr"/>
+          <a:lstStyle/>
+          <a:p>
+            <a:pPr algn="ctr"/>
+          </a:p>
+        </p:txBody>
+      </p:sp>
+      <p:pic>
+        <p:nvPicPr>
+          <p:cNvPr id="16" name="Picture 15" descr="bai1_p7_img1.jpeg"/>
+          <p:cNvPicPr>
+            <a:picLocks noChangeAspect="1"/>
+          </p:cNvPicPr>
+          <p:nvPr/>
+        </p:nvPicPr>
+        <p:blipFill>
+          <a:blip r:embed="rId4"/>
+          <a:stretch>
+            <a:fillRect/>
+          </a:stretch>
+        </p:blipFill>
+        <p:spPr>
+          <a:xfrm>
+            <a:off x="9105900" y="2766060"/>
+            <a:ext cx="1645920" cy="1828800"/>
+          </a:xfrm>
+          <a:prstGeom prst="rect">
+            <a:avLst/>
+          </a:prstGeom>
+        </p:spPr>
+      </p:pic>
+      <p:sp>
+        <p:nvSpPr>
+          <p:cNvPr id="17" name="TextBox 16"/>
+          <p:cNvSpPr txBox="1"/>
+          <p:nvPr/>
+        </p:nvSpPr>
+        <p:spPr>
+          <a:xfrm>
+            <a:off x="8263128" y="4594860"/>
+            <a:ext cx="3331464" cy="822960"/>
+          </a:xfrm>
+          <a:prstGeom prst="rect">
+            <a:avLst/>
+          </a:prstGeom>
+          <a:noFill/>
+        </p:spPr>
+        <p:txBody>
+          <a:bodyPr wrap="square">
+            <a:spAutoFit/>
+          </a:bodyPr>
+          <a:lstStyle/>
+          <a:p>
+            <a:pPr algn="ctr"/>
+            <a:r>
+              <a:rPr sz="1600" b="0">
+                <a:solidFill>
+                  <a:srgbClr val="831843"/>
+                </a:solidFill>
+                <a:latin typeface="Arial"/>
+              </a:rPr>
+              <a:t>Học trực tuyến qua Zoom, Google Meet</a:t>
+            </a:r>
+          </a:p>
+        </p:txBody>
+      </p:sp>
     </p:spTree>
   </p:cSld>
   <p:clrMapOvr>
@@ -4901,7 +5472,7 @@
                 </a:solidFill>
                 <a:latin typeface="Arial"/>
               </a:rPr>
-              <a:t>Máy tính trong đời sống</a:t>
+              <a:t>Máy tính trong mọi nghề nghiệp</a:t>
             </a:r>
           </a:p>
         </p:txBody>
@@ -4914,8 +5485,8 @@
         </p:nvSpPr>
         <p:spPr>
           <a:xfrm>
-            <a:off x="365760" y="2286000"/>
-            <a:ext cx="6858000" cy="3383279"/>
+            <a:off x="457200" y="2628900"/>
+            <a:ext cx="3605784" cy="2788920"/>
           </a:xfrm>
           <a:prstGeom prst="roundRect">
             <a:avLst/>
@@ -4923,8 +5494,10 @@
           <a:solidFill>
             <a:srgbClr val="FFFFFF"/>
           </a:solidFill>
-          <a:ln>
-            <a:noFill/>
+          <a:ln w="12700">
+            <a:solidFill>
+              <a:srgbClr val="D0D5DD"/>
+            </a:solidFill>
           </a:ln>
         </p:spPr>
         <p:style>
@@ -4957,8 +5530,8 @@
         </p:nvSpPr>
         <p:spPr>
           <a:xfrm>
-            <a:off x="365760" y="2286000"/>
-            <a:ext cx="109728" cy="3383279"/>
+            <a:off x="457200" y="2628900"/>
+            <a:ext cx="3605784" cy="91440"/>
           </a:xfrm>
           <a:prstGeom prst="rect">
             <a:avLst/>
@@ -4992,112 +5565,9 @@
           </a:p>
         </p:txBody>
       </p:sp>
-      <p:sp>
-        <p:nvSpPr>
-          <p:cNvPr id="8" name="TextBox 7"/>
-          <p:cNvSpPr txBox="1"/>
-          <p:nvPr/>
-        </p:nvSpPr>
-        <p:spPr>
-          <a:xfrm>
-            <a:off x="731520" y="2423160"/>
-            <a:ext cx="6309360" cy="3108960"/>
-          </a:xfrm>
-          <a:prstGeom prst="rect">
-            <a:avLst/>
-          </a:prstGeom>
-          <a:noFill/>
-        </p:spPr>
-        <p:txBody>
-          <a:bodyPr wrap="square">
-            <a:spAutoFit/>
-          </a:bodyPr>
-          <a:lstStyle/>
-          <a:p>
-            <a:pPr algn="l">
-              <a:spcAft>
-                <a:spcPts val="600"/>
-              </a:spcAft>
-            </a:pPr>
-            <a:r>
-              <a:rPr sz="1800" b="0">
-                <a:solidFill>
-                  <a:srgbClr val="831843"/>
-                </a:solidFill>
-                <a:latin typeface="Arial"/>
-              </a:rPr>
-              <a:t>Máy tính giúp mọi người:</a:t>
-            </a:r>
-          </a:p>
-          <a:p>
-            <a:pPr algn="l">
-              <a:spcAft>
-                <a:spcPts val="600"/>
-              </a:spcAft>
-            </a:pPr>
-            <a:r>
-              <a:rPr sz="1800" b="0">
-                <a:solidFill>
-                  <a:srgbClr val="831843"/>
-                </a:solidFill>
-                <a:latin typeface="Arial"/>
-              </a:rPr>
-              <a:t>● Bác sĩ — chẩn đoán bệnh</a:t>
-            </a:r>
-          </a:p>
-          <a:p>
-            <a:pPr algn="l">
-              <a:spcAft>
-                <a:spcPts val="600"/>
-              </a:spcAft>
-            </a:pPr>
-            <a:r>
-              <a:rPr sz="1800" b="0">
-                <a:solidFill>
-                  <a:srgbClr val="831843"/>
-                </a:solidFill>
-                <a:latin typeface="Arial"/>
-              </a:rPr>
-              <a:t>● Kỹ sư — thiết kế nhà</a:t>
-            </a:r>
-          </a:p>
-          <a:p>
-            <a:pPr algn="l">
-              <a:spcAft>
-                <a:spcPts val="600"/>
-              </a:spcAft>
-            </a:pPr>
-            <a:r>
-              <a:rPr sz="1800" b="0">
-                <a:solidFill>
-                  <a:srgbClr val="831843"/>
-                </a:solidFill>
-                <a:latin typeface="Arial"/>
-              </a:rPr>
-              <a:t>● Giáo viên — soạn giáo án</a:t>
-            </a:r>
-          </a:p>
-          <a:p>
-            <a:pPr algn="l">
-              <a:spcAft>
-                <a:spcPts val="600"/>
-              </a:spcAft>
-            </a:pPr>
-            <a:r>
-              <a:rPr sz="1800" b="0">
-                <a:solidFill>
-                  <a:srgbClr val="831843"/>
-                </a:solidFill>
-                <a:latin typeface="Arial"/>
-              </a:rPr>
-              <a:t>● Phi công — điều khiển máy bay</a:t>
-            </a:r>
-          </a:p>
-        </p:txBody>
-      </p:sp>
       <p:pic>
         <p:nvPicPr>
-          <p:cNvPr id="9" name="Picture 8" descr="bai1_p11_img1.jpeg"/>
+          <p:cNvPr id="8" name="Picture 7" descr="bai1_p8_img1.jpeg"/>
           <p:cNvPicPr>
             <a:picLocks noChangeAspect="1"/>
           </p:cNvPicPr>
@@ -5111,21 +5581,350 @@
         </p:blipFill>
         <p:spPr>
           <a:xfrm>
-            <a:off x="7589520" y="2286000"/>
-            <a:ext cx="4114799" cy="3383279"/>
+            <a:off x="1437132" y="2766060"/>
+            <a:ext cx="1645920" cy="1828800"/>
           </a:xfrm>
           <a:prstGeom prst="rect">
             <a:avLst/>
           </a:prstGeom>
         </p:spPr>
       </p:pic>
+      <p:sp>
+        <p:nvSpPr>
+          <p:cNvPr id="9" name="TextBox 8"/>
+          <p:cNvSpPr txBox="1"/>
+          <p:nvPr/>
+        </p:nvSpPr>
+        <p:spPr>
+          <a:xfrm>
+            <a:off x="594360" y="4594860"/>
+            <a:ext cx="3331464" cy="822960"/>
+          </a:xfrm>
+          <a:prstGeom prst="rect">
+            <a:avLst/>
+          </a:prstGeom>
+          <a:noFill/>
+        </p:spPr>
+        <p:txBody>
+          <a:bodyPr wrap="square">
+            <a:spAutoFit/>
+          </a:bodyPr>
+          <a:lstStyle/>
+          <a:p>
+            <a:pPr algn="ctr"/>
+            <a:r>
+              <a:rPr sz="1600" b="0">
+                <a:solidFill>
+                  <a:srgbClr val="831843"/>
+                </a:solidFill>
+                <a:latin typeface="Arial"/>
+              </a:rPr>
+              <a:t>Bác sĩ — chẩn đoán bệnh và lưu hồ sơ</a:t>
+            </a:r>
+          </a:p>
+        </p:txBody>
+      </p:sp>
+      <p:sp>
+        <p:nvSpPr>
+          <p:cNvPr id="10" name="Rounded Rectangle 9"/>
+          <p:cNvSpPr/>
+          <p:nvPr/>
+        </p:nvSpPr>
+        <p:spPr>
+          <a:xfrm>
+            <a:off x="4291584" y="2628900"/>
+            <a:ext cx="3605784" cy="2788920"/>
+          </a:xfrm>
+          <a:prstGeom prst="roundRect">
+            <a:avLst/>
+          </a:prstGeom>
+          <a:solidFill>
+            <a:srgbClr val="FFFFFF"/>
+          </a:solidFill>
+          <a:ln w="12700">
+            <a:solidFill>
+              <a:srgbClr val="D0D5DD"/>
+            </a:solidFill>
+          </a:ln>
+        </p:spPr>
+        <p:style>
+          <a:lnRef idx="1">
+            <a:schemeClr val="accent1"/>
+          </a:lnRef>
+          <a:fillRef idx="3">
+            <a:schemeClr val="accent1"/>
+          </a:fillRef>
+          <a:effectRef idx="2">
+            <a:schemeClr val="accent1"/>
+          </a:effectRef>
+          <a:fontRef idx="minor">
+            <a:schemeClr val="lt1"/>
+          </a:fontRef>
+        </p:style>
+        <p:txBody>
+          <a:bodyPr rtlCol="0" anchor="ctr"/>
+          <a:lstStyle/>
+          <a:p>
+            <a:pPr algn="ctr"/>
+          </a:p>
+        </p:txBody>
+      </p:sp>
+      <p:sp>
+        <p:nvSpPr>
+          <p:cNvPr id="11" name="Rectangle 10"/>
+          <p:cNvSpPr/>
+          <p:nvPr/>
+        </p:nvSpPr>
+        <p:spPr>
+          <a:xfrm>
+            <a:off x="4291584" y="2628900"/>
+            <a:ext cx="3605784" cy="91440"/>
+          </a:xfrm>
+          <a:prstGeom prst="rect">
+            <a:avLst/>
+          </a:prstGeom>
+          <a:solidFill>
+            <a:srgbClr val="EC4899"/>
+          </a:solidFill>
+          <a:ln>
+            <a:noFill/>
+          </a:ln>
+        </p:spPr>
+        <p:style>
+          <a:lnRef idx="1">
+            <a:schemeClr val="accent1"/>
+          </a:lnRef>
+          <a:fillRef idx="3">
+            <a:schemeClr val="accent1"/>
+          </a:fillRef>
+          <a:effectRef idx="2">
+            <a:schemeClr val="accent1"/>
+          </a:effectRef>
+          <a:fontRef idx="minor">
+            <a:schemeClr val="lt1"/>
+          </a:fontRef>
+        </p:style>
+        <p:txBody>
+          <a:bodyPr rtlCol="0" anchor="ctr"/>
+          <a:lstStyle/>
+          <a:p>
+            <a:pPr algn="ctr"/>
+          </a:p>
+        </p:txBody>
+      </p:sp>
+      <p:pic>
+        <p:nvPicPr>
+          <p:cNvPr id="12" name="Picture 11" descr="bai1_p9_img1.jpeg"/>
+          <p:cNvPicPr>
+            <a:picLocks noChangeAspect="1"/>
+          </p:cNvPicPr>
+          <p:nvPr/>
+        </p:nvPicPr>
+        <p:blipFill>
+          <a:blip r:embed="rId3"/>
+          <a:stretch>
+            <a:fillRect/>
+          </a:stretch>
+        </p:blipFill>
+        <p:spPr>
+          <a:xfrm>
+            <a:off x="5271516" y="2766060"/>
+            <a:ext cx="1645920" cy="1828800"/>
+          </a:xfrm>
+          <a:prstGeom prst="rect">
+            <a:avLst/>
+          </a:prstGeom>
+        </p:spPr>
+      </p:pic>
+      <p:sp>
+        <p:nvSpPr>
+          <p:cNvPr id="13" name="TextBox 12"/>
+          <p:cNvSpPr txBox="1"/>
+          <p:nvPr/>
+        </p:nvSpPr>
+        <p:spPr>
+          <a:xfrm>
+            <a:off x="4428744" y="4594860"/>
+            <a:ext cx="3331464" cy="822960"/>
+          </a:xfrm>
+          <a:prstGeom prst="rect">
+            <a:avLst/>
+          </a:prstGeom>
+          <a:noFill/>
+        </p:spPr>
+        <p:txBody>
+          <a:bodyPr wrap="square">
+            <a:spAutoFit/>
+          </a:bodyPr>
+          <a:lstStyle/>
+          <a:p>
+            <a:pPr algn="ctr"/>
+            <a:r>
+              <a:rPr sz="1600" b="0">
+                <a:solidFill>
+                  <a:srgbClr val="831843"/>
+                </a:solidFill>
+                <a:latin typeface="Arial"/>
+              </a:rPr>
+              <a:t>Kỹ sư — thiết kế công trình và bản vẽ</a:t>
+            </a:r>
+          </a:p>
+        </p:txBody>
+      </p:sp>
+      <p:sp>
+        <p:nvSpPr>
+          <p:cNvPr id="14" name="Rounded Rectangle 13"/>
+          <p:cNvSpPr/>
+          <p:nvPr/>
+        </p:nvSpPr>
+        <p:spPr>
+          <a:xfrm>
+            <a:off x="8125968" y="2628900"/>
+            <a:ext cx="3605784" cy="2788920"/>
+          </a:xfrm>
+          <a:prstGeom prst="roundRect">
+            <a:avLst/>
+          </a:prstGeom>
+          <a:solidFill>
+            <a:srgbClr val="FFFFFF"/>
+          </a:solidFill>
+          <a:ln w="12700">
+            <a:solidFill>
+              <a:srgbClr val="D0D5DD"/>
+            </a:solidFill>
+          </a:ln>
+        </p:spPr>
+        <p:style>
+          <a:lnRef idx="1">
+            <a:schemeClr val="accent1"/>
+          </a:lnRef>
+          <a:fillRef idx="3">
+            <a:schemeClr val="accent1"/>
+          </a:fillRef>
+          <a:effectRef idx="2">
+            <a:schemeClr val="accent1"/>
+          </a:effectRef>
+          <a:fontRef idx="minor">
+            <a:schemeClr val="lt1"/>
+          </a:fontRef>
+        </p:style>
+        <p:txBody>
+          <a:bodyPr rtlCol="0" anchor="ctr"/>
+          <a:lstStyle/>
+          <a:p>
+            <a:pPr algn="ctr"/>
+          </a:p>
+        </p:txBody>
+      </p:sp>
+      <p:sp>
+        <p:nvSpPr>
+          <p:cNvPr id="15" name="Rectangle 14"/>
+          <p:cNvSpPr/>
+          <p:nvPr/>
+        </p:nvSpPr>
+        <p:spPr>
+          <a:xfrm>
+            <a:off x="8125968" y="2628900"/>
+            <a:ext cx="3605784" cy="91440"/>
+          </a:xfrm>
+          <a:prstGeom prst="rect">
+            <a:avLst/>
+          </a:prstGeom>
+          <a:solidFill>
+            <a:srgbClr val="EC4899"/>
+          </a:solidFill>
+          <a:ln>
+            <a:noFill/>
+          </a:ln>
+        </p:spPr>
+        <p:style>
+          <a:lnRef idx="1">
+            <a:schemeClr val="accent1"/>
+          </a:lnRef>
+          <a:fillRef idx="3">
+            <a:schemeClr val="accent1"/>
+          </a:fillRef>
+          <a:effectRef idx="2">
+            <a:schemeClr val="accent1"/>
+          </a:effectRef>
+          <a:fontRef idx="minor">
+            <a:schemeClr val="lt1"/>
+          </a:fontRef>
+        </p:style>
+        <p:txBody>
+          <a:bodyPr rtlCol="0" anchor="ctr"/>
+          <a:lstStyle/>
+          <a:p>
+            <a:pPr algn="ctr"/>
+          </a:p>
+        </p:txBody>
+      </p:sp>
+      <p:pic>
+        <p:nvPicPr>
+          <p:cNvPr id="16" name="Picture 15" descr="bai1_p10_img1.jpeg"/>
+          <p:cNvPicPr>
+            <a:picLocks noChangeAspect="1"/>
+          </p:cNvPicPr>
+          <p:nvPr/>
+        </p:nvPicPr>
+        <p:blipFill>
+          <a:blip r:embed="rId4"/>
+          <a:stretch>
+            <a:fillRect/>
+          </a:stretch>
+        </p:blipFill>
+        <p:spPr>
+          <a:xfrm>
+            <a:off x="9105900" y="2766060"/>
+            <a:ext cx="1645920" cy="1828800"/>
+          </a:xfrm>
+          <a:prstGeom prst="rect">
+            <a:avLst/>
+          </a:prstGeom>
+        </p:spPr>
+      </p:pic>
+      <p:sp>
+        <p:nvSpPr>
+          <p:cNvPr id="17" name="TextBox 16"/>
+          <p:cNvSpPr txBox="1"/>
+          <p:nvPr/>
+        </p:nvSpPr>
+        <p:spPr>
+          <a:xfrm>
+            <a:off x="8263128" y="4594860"/>
+            <a:ext cx="3331464" cy="822960"/>
+          </a:xfrm>
+          <a:prstGeom prst="rect">
+            <a:avLst/>
+          </a:prstGeom>
+          <a:noFill/>
+        </p:spPr>
+        <p:txBody>
+          <a:bodyPr wrap="square">
+            <a:spAutoFit/>
+          </a:bodyPr>
+          <a:lstStyle/>
+          <a:p>
+            <a:pPr algn="ctr"/>
+            <a:r>
+              <a:rPr sz="1600" b="0">
+                <a:solidFill>
+                  <a:srgbClr val="831843"/>
+                </a:solidFill>
+                <a:latin typeface="Arial"/>
+              </a:rPr>
+              <a:t>Giáo viên — giảng dạy và soạn giáo án</a:t>
+            </a:r>
+          </a:p>
+        </p:txBody>
+      </p:sp>
     </p:spTree>
   </p:cSld>
   <p:clrMapOvr>
     <a:masterClrMapping/>
   </p:clrMapOvr>
   <p:transition spd="med">
-    <p:fade/>
+    <p:wipe/>
   </p:transition>
 </p:sld>
 </file>
@@ -5305,7 +6104,7 @@
         <p:spPr>
           <a:xfrm>
             <a:off x="457200" y="2286000"/>
-            <a:ext cx="11274552" cy="822960"/>
+            <a:ext cx="11274552" cy="640080"/>
           </a:xfrm>
           <a:prstGeom prst="rect">
             <a:avLst/>
@@ -5324,61 +6123,429 @@
               </a:spcAft>
             </a:pPr>
             <a:r>
-              <a:rPr sz="1700" b="0">
+              <a:rPr sz="1800" b="0">
                 <a:solidFill>
                   <a:srgbClr val="831843"/>
                 </a:solidFill>
                 <a:latin typeface="Arial"/>
               </a:rPr>
-              <a:t>Bước 1: Mở phần mềm soạn thảo (Word)</a:t>
-            </a:r>
-          </a:p>
-          <a:p>
-            <a:pPr algn="l">
-              <a:spcAft>
-                <a:spcPts val="600"/>
-              </a:spcAft>
-            </a:pPr>
-            <a:r>
-              <a:rPr sz="1700" b="0">
+              <a:t>Thực hiện lần lượt các bước:</a:t>
+            </a:r>
+          </a:p>
+        </p:txBody>
+      </p:sp>
+      <p:sp>
+        <p:nvSpPr>
+          <p:cNvPr id="7" name="Rounded Rectangle 6"/>
+          <p:cNvSpPr/>
+          <p:nvPr/>
+        </p:nvSpPr>
+        <p:spPr>
+          <a:xfrm>
+            <a:off x="457200" y="3017520"/>
+            <a:ext cx="5522976" cy="1280159"/>
+          </a:xfrm>
+          <a:prstGeom prst="roundRect">
+            <a:avLst/>
+          </a:prstGeom>
+          <a:solidFill>
+            <a:srgbClr val="FFFFFF"/>
+          </a:solidFill>
+          <a:ln w="12700">
+            <a:solidFill>
+              <a:srgbClr val="EC4899"/>
+            </a:solidFill>
+          </a:ln>
+        </p:spPr>
+        <p:style>
+          <a:lnRef idx="1">
+            <a:schemeClr val="accent1"/>
+          </a:lnRef>
+          <a:fillRef idx="3">
+            <a:schemeClr val="accent1"/>
+          </a:fillRef>
+          <a:effectRef idx="2">
+            <a:schemeClr val="accent1"/>
+          </a:effectRef>
+          <a:fontRef idx="minor">
+            <a:schemeClr val="lt1"/>
+          </a:fontRef>
+        </p:style>
+        <p:txBody>
+          <a:bodyPr rtlCol="0" anchor="ctr"/>
+          <a:lstStyle/>
+          <a:p>
+            <a:pPr algn="ctr"/>
+          </a:p>
+        </p:txBody>
+      </p:sp>
+      <p:pic>
+        <p:nvPicPr>
+          <p:cNvPr id="8" name="Picture 7" descr="bai1_p10_img1.jpeg"/>
+          <p:cNvPicPr>
+            <a:picLocks noChangeAspect="1"/>
+          </p:cNvPicPr>
+          <p:nvPr/>
+        </p:nvPicPr>
+        <p:blipFill>
+          <a:blip r:embed="rId2"/>
+          <a:stretch>
+            <a:fillRect/>
+          </a:stretch>
+        </p:blipFill>
+        <p:spPr>
+          <a:xfrm>
+            <a:off x="640080" y="3154679"/>
+            <a:ext cx="1280160" cy="1005840"/>
+          </a:xfrm>
+          <a:prstGeom prst="rect">
+            <a:avLst/>
+          </a:prstGeom>
+        </p:spPr>
+      </p:pic>
+      <p:sp>
+        <p:nvSpPr>
+          <p:cNvPr id="9" name="TextBox 8"/>
+          <p:cNvSpPr txBox="1"/>
+          <p:nvPr/>
+        </p:nvSpPr>
+        <p:spPr>
+          <a:xfrm>
+            <a:off x="2103120" y="3154679"/>
+            <a:ext cx="3785616" cy="1005839"/>
+          </a:xfrm>
+          <a:prstGeom prst="rect">
+            <a:avLst/>
+          </a:prstGeom>
+          <a:noFill/>
+        </p:spPr>
+        <p:txBody>
+          <a:bodyPr wrap="square">
+            <a:spAutoFit/>
+          </a:bodyPr>
+          <a:lstStyle/>
+          <a:p>
+            <a:pPr algn="l"/>
+            <a:r>
+              <a:rPr sz="1600" b="1">
                 <a:solidFill>
                   <a:srgbClr val="831843"/>
                 </a:solidFill>
                 <a:latin typeface="Arial"/>
               </a:rPr>
-              <a:t>Bước 2: Gõ họ tên và lớp của em</a:t>
-            </a:r>
-          </a:p>
-          <a:p>
-            <a:pPr algn="l">
-              <a:spcAft>
-                <a:spcPts val="600"/>
-              </a:spcAft>
-            </a:pPr>
-            <a:r>
-              <a:rPr sz="1700" b="0">
+              <a:t>Mở phần mềm Word</a:t>
+            </a:r>
+          </a:p>
+        </p:txBody>
+      </p:sp>
+      <p:sp>
+        <p:nvSpPr>
+          <p:cNvPr id="10" name="Rounded Rectangle 9"/>
+          <p:cNvSpPr/>
+          <p:nvPr/>
+        </p:nvSpPr>
+        <p:spPr>
+          <a:xfrm>
+            <a:off x="6208776" y="3017520"/>
+            <a:ext cx="5522976" cy="1280159"/>
+          </a:xfrm>
+          <a:prstGeom prst="roundRect">
+            <a:avLst/>
+          </a:prstGeom>
+          <a:solidFill>
+            <a:srgbClr val="FFFFFF"/>
+          </a:solidFill>
+          <a:ln w="12700">
+            <a:solidFill>
+              <a:srgbClr val="EC4899"/>
+            </a:solidFill>
+          </a:ln>
+        </p:spPr>
+        <p:style>
+          <a:lnRef idx="1">
+            <a:schemeClr val="accent1"/>
+          </a:lnRef>
+          <a:fillRef idx="3">
+            <a:schemeClr val="accent1"/>
+          </a:fillRef>
+          <a:effectRef idx="2">
+            <a:schemeClr val="accent1"/>
+          </a:effectRef>
+          <a:fontRef idx="minor">
+            <a:schemeClr val="lt1"/>
+          </a:fontRef>
+        </p:style>
+        <p:txBody>
+          <a:bodyPr rtlCol="0" anchor="ctr"/>
+          <a:lstStyle/>
+          <a:p>
+            <a:pPr algn="ctr"/>
+          </a:p>
+        </p:txBody>
+      </p:sp>
+      <p:pic>
+        <p:nvPicPr>
+          <p:cNvPr id="11" name="Picture 10" descr="bai1_p11_img1.jpeg"/>
+          <p:cNvPicPr>
+            <a:picLocks noChangeAspect="1"/>
+          </p:cNvPicPr>
+          <p:nvPr/>
+        </p:nvPicPr>
+        <p:blipFill>
+          <a:blip r:embed="rId3"/>
+          <a:stretch>
+            <a:fillRect/>
+          </a:stretch>
+        </p:blipFill>
+        <p:spPr>
+          <a:xfrm>
+            <a:off x="6391656" y="3154679"/>
+            <a:ext cx="1280160" cy="1005840"/>
+          </a:xfrm>
+          <a:prstGeom prst="rect">
+            <a:avLst/>
+          </a:prstGeom>
+        </p:spPr>
+      </p:pic>
+      <p:sp>
+        <p:nvSpPr>
+          <p:cNvPr id="12" name="TextBox 11"/>
+          <p:cNvSpPr txBox="1"/>
+          <p:nvPr/>
+        </p:nvSpPr>
+        <p:spPr>
+          <a:xfrm>
+            <a:off x="7854696" y="3154679"/>
+            <a:ext cx="3785616" cy="1005839"/>
+          </a:xfrm>
+          <a:prstGeom prst="rect">
+            <a:avLst/>
+          </a:prstGeom>
+          <a:noFill/>
+        </p:spPr>
+        <p:txBody>
+          <a:bodyPr wrap="square">
+            <a:spAutoFit/>
+          </a:bodyPr>
+          <a:lstStyle/>
+          <a:p>
+            <a:pPr algn="l"/>
+            <a:r>
+              <a:rPr sz="1600" b="1">
                 <a:solidFill>
                   <a:srgbClr val="831843"/>
                 </a:solidFill>
                 <a:latin typeface="Arial"/>
               </a:rPr>
-              <a:t>Bước 3: Viết "Em thích dùng máy tính để..."</a:t>
-            </a:r>
-          </a:p>
-          <a:p>
-            <a:pPr algn="l">
-              <a:spcAft>
-                <a:spcPts val="600"/>
-              </a:spcAft>
-            </a:pPr>
-            <a:r>
-              <a:rPr sz="1700" b="0">
+              <a:t>Gõ họ tên và lớp của em</a:t>
+            </a:r>
+          </a:p>
+        </p:txBody>
+      </p:sp>
+      <p:sp>
+        <p:nvSpPr>
+          <p:cNvPr id="13" name="Rounded Rectangle 12"/>
+          <p:cNvSpPr/>
+          <p:nvPr/>
+        </p:nvSpPr>
+        <p:spPr>
+          <a:xfrm>
+            <a:off x="457200" y="4526279"/>
+            <a:ext cx="5522976" cy="1280160"/>
+          </a:xfrm>
+          <a:prstGeom prst="roundRect">
+            <a:avLst/>
+          </a:prstGeom>
+          <a:solidFill>
+            <a:srgbClr val="FFFFFF"/>
+          </a:solidFill>
+          <a:ln w="12700">
+            <a:solidFill>
+              <a:srgbClr val="EC4899"/>
+            </a:solidFill>
+          </a:ln>
+        </p:spPr>
+        <p:style>
+          <a:lnRef idx="1">
+            <a:schemeClr val="accent1"/>
+          </a:lnRef>
+          <a:fillRef idx="3">
+            <a:schemeClr val="accent1"/>
+          </a:fillRef>
+          <a:effectRef idx="2">
+            <a:schemeClr val="accent1"/>
+          </a:effectRef>
+          <a:fontRef idx="minor">
+            <a:schemeClr val="lt1"/>
+          </a:fontRef>
+        </p:style>
+        <p:txBody>
+          <a:bodyPr rtlCol="0" anchor="ctr"/>
+          <a:lstStyle/>
+          <a:p>
+            <a:pPr algn="ctr"/>
+          </a:p>
+        </p:txBody>
+      </p:sp>
+      <p:pic>
+        <p:nvPicPr>
+          <p:cNvPr id="14" name="Picture 13" descr="bai1_p12_img1.jpeg"/>
+          <p:cNvPicPr>
+            <a:picLocks noChangeAspect="1"/>
+          </p:cNvPicPr>
+          <p:nvPr/>
+        </p:nvPicPr>
+        <p:blipFill>
+          <a:blip r:embed="rId4"/>
+          <a:stretch>
+            <a:fillRect/>
+          </a:stretch>
+        </p:blipFill>
+        <p:spPr>
+          <a:xfrm>
+            <a:off x="640080" y="4663440"/>
+            <a:ext cx="1280160" cy="1005839"/>
+          </a:xfrm>
+          <a:prstGeom prst="rect">
+            <a:avLst/>
+          </a:prstGeom>
+        </p:spPr>
+      </p:pic>
+      <p:sp>
+        <p:nvSpPr>
+          <p:cNvPr id="15" name="TextBox 14"/>
+          <p:cNvSpPr txBox="1"/>
+          <p:nvPr/>
+        </p:nvSpPr>
+        <p:spPr>
+          <a:xfrm>
+            <a:off x="2103120" y="4663440"/>
+            <a:ext cx="3785616" cy="1005839"/>
+          </a:xfrm>
+          <a:prstGeom prst="rect">
+            <a:avLst/>
+          </a:prstGeom>
+          <a:noFill/>
+        </p:spPr>
+        <p:txBody>
+          <a:bodyPr wrap="square">
+            <a:spAutoFit/>
+          </a:bodyPr>
+          <a:lstStyle/>
+          <a:p>
+            <a:pPr algn="l"/>
+            <a:r>
+              <a:rPr sz="1600" b="1">
                 <a:solidFill>
                   <a:srgbClr val="831843"/>
                 </a:solidFill>
                 <a:latin typeface="Arial"/>
               </a:rPr>
-              <a:t>Bước 4: Lưu file với tên của em</a:t>
+              <a:t>Viết câu: 'Em thích máy tính vì...'</a:t>
+            </a:r>
+          </a:p>
+        </p:txBody>
+      </p:sp>
+      <p:sp>
+        <p:nvSpPr>
+          <p:cNvPr id="16" name="Rounded Rectangle 15"/>
+          <p:cNvSpPr/>
+          <p:nvPr/>
+        </p:nvSpPr>
+        <p:spPr>
+          <a:xfrm>
+            <a:off x="6208776" y="4526279"/>
+            <a:ext cx="5522976" cy="1280160"/>
+          </a:xfrm>
+          <a:prstGeom prst="roundRect">
+            <a:avLst/>
+          </a:prstGeom>
+          <a:solidFill>
+            <a:srgbClr val="FFFFFF"/>
+          </a:solidFill>
+          <a:ln w="12700">
+            <a:solidFill>
+              <a:srgbClr val="EC4899"/>
+            </a:solidFill>
+          </a:ln>
+        </p:spPr>
+        <p:style>
+          <a:lnRef idx="1">
+            <a:schemeClr val="accent1"/>
+          </a:lnRef>
+          <a:fillRef idx="3">
+            <a:schemeClr val="accent1"/>
+          </a:fillRef>
+          <a:effectRef idx="2">
+            <a:schemeClr val="accent1"/>
+          </a:effectRef>
+          <a:fontRef idx="minor">
+            <a:schemeClr val="lt1"/>
+          </a:fontRef>
+        </p:style>
+        <p:txBody>
+          <a:bodyPr rtlCol="0" anchor="ctr"/>
+          <a:lstStyle/>
+          <a:p>
+            <a:pPr algn="ctr"/>
+          </a:p>
+        </p:txBody>
+      </p:sp>
+      <p:pic>
+        <p:nvPicPr>
+          <p:cNvPr id="17" name="Picture 16" descr="bai1_p13_img1.jpeg"/>
+          <p:cNvPicPr>
+            <a:picLocks noChangeAspect="1"/>
+          </p:cNvPicPr>
+          <p:nvPr/>
+        </p:nvPicPr>
+        <p:blipFill>
+          <a:blip r:embed="rId5"/>
+          <a:stretch>
+            <a:fillRect/>
+          </a:stretch>
+        </p:blipFill>
+        <p:spPr>
+          <a:xfrm>
+            <a:off x="6391656" y="4663440"/>
+            <a:ext cx="1280160" cy="1005839"/>
+          </a:xfrm>
+          <a:prstGeom prst="rect">
+            <a:avLst/>
+          </a:prstGeom>
+        </p:spPr>
+      </p:pic>
+      <p:sp>
+        <p:nvSpPr>
+          <p:cNvPr id="18" name="TextBox 17"/>
+          <p:cNvSpPr txBox="1"/>
+          <p:nvPr/>
+        </p:nvSpPr>
+        <p:spPr>
+          <a:xfrm>
+            <a:off x="7854696" y="4663440"/>
+            <a:ext cx="3785616" cy="1005839"/>
+          </a:xfrm>
+          <a:prstGeom prst="rect">
+            <a:avLst/>
+          </a:prstGeom>
+          <a:noFill/>
+        </p:spPr>
+        <p:txBody>
+          <a:bodyPr wrap="square">
+            <a:spAutoFit/>
+          </a:bodyPr>
+          <a:lstStyle/>
+          <a:p>
+            <a:pPr algn="l"/>
+            <a:r>
+              <a:rPr sz="1600" b="1">
+                <a:solidFill>
+                  <a:srgbClr val="831843"/>
+                </a:solidFill>
+                <a:latin typeface="Arial"/>
+              </a:rPr>
+              <a:t>Lưu file bài làm vào thư mục</a:t>
             </a:r>
           </a:p>
         </p:txBody>
@@ -5388,6 +6555,396 @@
   <p:clrMapOvr>
     <a:masterClrMapping/>
   </p:clrMapOvr>
+  <p:timing>
+    <p:tnLst>
+      <p:par>
+        <p:cTn id="1" dur="indefinite" restart="never" nodeType="tmRoot">
+          <p:childTnLst>
+            <p:seq concurrent="1" nextAc="seek">
+              <p:cTn id="2" dur="indefinite" nodeType="mainSeq">
+                <p:childTnLst>
+                  <p:par>
+                    <p:cTn id="3" fill="hold">
+                      <p:stCondLst>
+                        <p:cond delay="0"/>
+                      </p:stCondLst>
+                      <p:childTnLst>
+                        <p:par>
+                          <p:cTn id="4" presetID="1" presetClass="entr" presetSubtype="0" fill="hold">
+                            <p:stCondLst>
+                              <p:cond delay="0"/>
+                            </p:stCondLst>
+                            <p:childTnLst>
+                              <p:set>
+                                <p:cBhvr>
+                                  <p:cTn id="5" dur="1" fill="hold">
+                                    <p:stCondLst>
+                                      <p:cond delay="0"/>
+                                    </p:stCondLst>
+                                  </p:cTn>
+                                  <p:tgtEl>
+                                    <p:spTgt spid="7"/>
+                                  </p:tgtEl>
+                                  <p:attrNameLst>
+                                    <p:attrName>style.visibility</p:attrName>
+                                  </p:attrNameLst>
+                                </p:cBhvr>
+                                <p:to>
+                                  <p:strVal val="visible"/>
+                                </p:to>
+                              </p:set>
+                            </p:childTnLst>
+                          </p:cTn>
+                        </p:par>
+                        <p:par>
+                          <p:cTn id="6" presetID="1" presetClass="entr" presetSubtype="0" fill="hold">
+                            <p:stCondLst>
+                              <p:cond delay="0"/>
+                            </p:stCondLst>
+                            <p:childTnLst>
+                              <p:set>
+                                <p:cBhvr>
+                                  <p:cTn id="7" dur="1" fill="hold">
+                                    <p:stCondLst>
+                                      <p:cond delay="0"/>
+                                    </p:stCondLst>
+                                  </p:cTn>
+                                  <p:tgtEl>
+                                    <p:spTgt spid="8"/>
+                                  </p:tgtEl>
+                                  <p:attrNameLst>
+                                    <p:attrName>style.visibility</p:attrName>
+                                  </p:attrNameLst>
+                                </p:cBhvr>
+                                <p:to>
+                                  <p:strVal val="visible"/>
+                                </p:to>
+                              </p:set>
+                            </p:childTnLst>
+                          </p:cTn>
+                        </p:par>
+                        <p:par>
+                          <p:cTn id="8" presetID="1" presetClass="entr" presetSubtype="0" fill="hold">
+                            <p:stCondLst>
+                              <p:cond delay="0"/>
+                            </p:stCondLst>
+                            <p:childTnLst>
+                              <p:set>
+                                <p:cBhvr>
+                                  <p:cTn id="9" dur="1" fill="hold">
+                                    <p:stCondLst>
+                                      <p:cond delay="0"/>
+                                    </p:stCondLst>
+                                  </p:cTn>
+                                  <p:tgtEl>
+                                    <p:spTgt spid="9"/>
+                                  </p:tgtEl>
+                                  <p:attrNameLst>
+                                    <p:attrName>style.visibility</p:attrName>
+                                  </p:attrNameLst>
+                                </p:cBhvr>
+                                <p:to>
+                                  <p:strVal val="visible"/>
+                                </p:to>
+                              </p:set>
+                            </p:childTnLst>
+                          </p:cTn>
+                        </p:par>
+                      </p:childTnLst>
+                    </p:cTn>
+                  </p:par>
+                  <p:par>
+                    <p:cTn id="10" fill="hold">
+                      <p:stCondLst>
+                        <p:cond delay="0"/>
+                      </p:stCondLst>
+                      <p:childTnLst>
+                        <p:par>
+                          <p:cTn id="11" presetID="1" presetClass="entr" presetSubtype="0" fill="hold">
+                            <p:stCondLst>
+                              <p:cond delay="0"/>
+                            </p:stCondLst>
+                            <p:childTnLst>
+                              <p:set>
+                                <p:cBhvr>
+                                  <p:cTn id="12" dur="1" fill="hold">
+                                    <p:stCondLst>
+                                      <p:cond delay="0"/>
+                                    </p:stCondLst>
+                                  </p:cTn>
+                                  <p:tgtEl>
+                                    <p:spTgt spid="10"/>
+                                  </p:tgtEl>
+                                  <p:attrNameLst>
+                                    <p:attrName>style.visibility</p:attrName>
+                                  </p:attrNameLst>
+                                </p:cBhvr>
+                                <p:to>
+                                  <p:strVal val="visible"/>
+                                </p:to>
+                              </p:set>
+                            </p:childTnLst>
+                          </p:cTn>
+                        </p:par>
+                        <p:par>
+                          <p:cTn id="13" presetID="1" presetClass="entr" presetSubtype="0" fill="hold">
+                            <p:stCondLst>
+                              <p:cond delay="0"/>
+                            </p:stCondLst>
+                            <p:childTnLst>
+                              <p:set>
+                                <p:cBhvr>
+                                  <p:cTn id="14" dur="1" fill="hold">
+                                    <p:stCondLst>
+                                      <p:cond delay="0"/>
+                                    </p:stCondLst>
+                                  </p:cTn>
+                                  <p:tgtEl>
+                                    <p:spTgt spid="11"/>
+                                  </p:tgtEl>
+                                  <p:attrNameLst>
+                                    <p:attrName>style.visibility</p:attrName>
+                                  </p:attrNameLst>
+                                </p:cBhvr>
+                                <p:to>
+                                  <p:strVal val="visible"/>
+                                </p:to>
+                              </p:set>
+                            </p:childTnLst>
+                          </p:cTn>
+                        </p:par>
+                        <p:par>
+                          <p:cTn id="15" presetID="1" presetClass="entr" presetSubtype="0" fill="hold">
+                            <p:stCondLst>
+                              <p:cond delay="0"/>
+                            </p:stCondLst>
+                            <p:childTnLst>
+                              <p:set>
+                                <p:cBhvr>
+                                  <p:cTn id="16" dur="1" fill="hold">
+                                    <p:stCondLst>
+                                      <p:cond delay="0"/>
+                                    </p:stCondLst>
+                                  </p:cTn>
+                                  <p:tgtEl>
+                                    <p:spTgt spid="12"/>
+                                  </p:tgtEl>
+                                  <p:attrNameLst>
+                                    <p:attrName>style.visibility</p:attrName>
+                                  </p:attrNameLst>
+                                </p:cBhvr>
+                                <p:to>
+                                  <p:strVal val="visible"/>
+                                </p:to>
+                              </p:set>
+                            </p:childTnLst>
+                          </p:cTn>
+                        </p:par>
+                      </p:childTnLst>
+                    </p:cTn>
+                  </p:par>
+                  <p:par>
+                    <p:cTn id="17" fill="hold">
+                      <p:stCondLst>
+                        <p:cond delay="0"/>
+                      </p:stCondLst>
+                      <p:childTnLst>
+                        <p:par>
+                          <p:cTn id="18" presetID="1" presetClass="entr" presetSubtype="0" fill="hold">
+                            <p:stCondLst>
+                              <p:cond delay="0"/>
+                            </p:stCondLst>
+                            <p:childTnLst>
+                              <p:set>
+                                <p:cBhvr>
+                                  <p:cTn id="19" dur="1" fill="hold">
+                                    <p:stCondLst>
+                                      <p:cond delay="0"/>
+                                    </p:stCondLst>
+                                  </p:cTn>
+                                  <p:tgtEl>
+                                    <p:spTgt spid="13"/>
+                                  </p:tgtEl>
+                                  <p:attrNameLst>
+                                    <p:attrName>style.visibility</p:attrName>
+                                  </p:attrNameLst>
+                                </p:cBhvr>
+                                <p:to>
+                                  <p:strVal val="visible"/>
+                                </p:to>
+                              </p:set>
+                            </p:childTnLst>
+                          </p:cTn>
+                        </p:par>
+                        <p:par>
+                          <p:cTn id="20" presetID="1" presetClass="entr" presetSubtype="0" fill="hold">
+                            <p:stCondLst>
+                              <p:cond delay="0"/>
+                            </p:stCondLst>
+                            <p:childTnLst>
+                              <p:set>
+                                <p:cBhvr>
+                                  <p:cTn id="21" dur="1" fill="hold">
+                                    <p:stCondLst>
+                                      <p:cond delay="0"/>
+                                    </p:stCondLst>
+                                  </p:cTn>
+                                  <p:tgtEl>
+                                    <p:spTgt spid="14"/>
+                                  </p:tgtEl>
+                                  <p:attrNameLst>
+                                    <p:attrName>style.visibility</p:attrName>
+                                  </p:attrNameLst>
+                                </p:cBhvr>
+                                <p:to>
+                                  <p:strVal val="visible"/>
+                                </p:to>
+                              </p:set>
+                            </p:childTnLst>
+                          </p:cTn>
+                        </p:par>
+                        <p:par>
+                          <p:cTn id="22" presetID="1" presetClass="entr" presetSubtype="0" fill="hold">
+                            <p:stCondLst>
+                              <p:cond delay="0"/>
+                            </p:stCondLst>
+                            <p:childTnLst>
+                              <p:set>
+                                <p:cBhvr>
+                                  <p:cTn id="23" dur="1" fill="hold">
+                                    <p:stCondLst>
+                                      <p:cond delay="0"/>
+                                    </p:stCondLst>
+                                  </p:cTn>
+                                  <p:tgtEl>
+                                    <p:spTgt spid="15"/>
+                                  </p:tgtEl>
+                                  <p:attrNameLst>
+                                    <p:attrName>style.visibility</p:attrName>
+                                  </p:attrNameLst>
+                                </p:cBhvr>
+                                <p:to>
+                                  <p:strVal val="visible"/>
+                                </p:to>
+                              </p:set>
+                            </p:childTnLst>
+                          </p:cTn>
+                        </p:par>
+                      </p:childTnLst>
+                    </p:cTn>
+                  </p:par>
+                  <p:par>
+                    <p:cTn id="24" fill="hold">
+                      <p:stCondLst>
+                        <p:cond delay="0"/>
+                      </p:stCondLst>
+                      <p:childTnLst>
+                        <p:par>
+                          <p:cTn id="25" presetID="1" presetClass="entr" presetSubtype="0" fill="hold">
+                            <p:stCondLst>
+                              <p:cond delay="0"/>
+                            </p:stCondLst>
+                            <p:childTnLst>
+                              <p:set>
+                                <p:cBhvr>
+                                  <p:cTn id="26" dur="1" fill="hold">
+                                    <p:stCondLst>
+                                      <p:cond delay="0"/>
+                                    </p:stCondLst>
+                                  </p:cTn>
+                                  <p:tgtEl>
+                                    <p:spTgt spid="16"/>
+                                  </p:tgtEl>
+                                  <p:attrNameLst>
+                                    <p:attrName>style.visibility</p:attrName>
+                                  </p:attrNameLst>
+                                </p:cBhvr>
+                                <p:to>
+                                  <p:strVal val="visible"/>
+                                </p:to>
+                              </p:set>
+                            </p:childTnLst>
+                          </p:cTn>
+                        </p:par>
+                        <p:par>
+                          <p:cTn id="27" presetID="1" presetClass="entr" presetSubtype="0" fill="hold">
+                            <p:stCondLst>
+                              <p:cond delay="0"/>
+                            </p:stCondLst>
+                            <p:childTnLst>
+                              <p:set>
+                                <p:cBhvr>
+                                  <p:cTn id="28" dur="1" fill="hold">
+                                    <p:stCondLst>
+                                      <p:cond delay="0"/>
+                                    </p:stCondLst>
+                                  </p:cTn>
+                                  <p:tgtEl>
+                                    <p:spTgt spid="17"/>
+                                  </p:tgtEl>
+                                  <p:attrNameLst>
+                                    <p:attrName>style.visibility</p:attrName>
+                                  </p:attrNameLst>
+                                </p:cBhvr>
+                                <p:to>
+                                  <p:strVal val="visible"/>
+                                </p:to>
+                              </p:set>
+                            </p:childTnLst>
+                          </p:cTn>
+                        </p:par>
+                        <p:par>
+                          <p:cTn id="29" presetID="1" presetClass="entr" presetSubtype="0" fill="hold">
+                            <p:stCondLst>
+                              <p:cond delay="0"/>
+                            </p:stCondLst>
+                            <p:childTnLst>
+                              <p:set>
+                                <p:cBhvr>
+                                  <p:cTn id="30" dur="1" fill="hold">
+                                    <p:stCondLst>
+                                      <p:cond delay="0"/>
+                                    </p:stCondLst>
+                                  </p:cTn>
+                                  <p:tgtEl>
+                                    <p:spTgt spid="18"/>
+                                  </p:tgtEl>
+                                  <p:attrNameLst>
+                                    <p:attrName>style.visibility</p:attrName>
+                                  </p:attrNameLst>
+                                </p:cBhvr>
+                                <p:to>
+                                  <p:strVal val="visible"/>
+                                </p:to>
+                              </p:set>
+                            </p:childTnLst>
+                          </p:cTn>
+                        </p:par>
+                      </p:childTnLst>
+                    </p:cTn>
+                  </p:par>
+                </p:childTnLst>
+              </p:cTn>
+              <p:prevCondLst>
+                <p:cond evt="onPrev" delay="0">
+                  <p:tgtEl>
+                    <p:sldTgt/>
+                  </p:tgtEl>
+                </p:cond>
+              </p:prevCondLst>
+              <p:nextCondLst>
+                <p:cond evt="onNext" delay="0">
+                  <p:tgtEl>
+                    <p:sldTgt/>
+                  </p:tgtEl>
+                </p:cond>
+              </p:nextCondLst>
+            </p:seq>
+          </p:childTnLst>
+        </p:cTn>
+      </p:par>
+    </p:tnLst>
+  </p:timing>
   <p:transition spd="med">
     <p:wipe/>
   </p:transition>
@@ -5520,7 +7077,7 @@
                 </a:solidFill>
                 <a:latin typeface="Arial"/>
               </a:rPr>
-              <a:t>  LỚP 5 • LUYỆN TẬP</a:t>
+              <a:t>  LỚP 5 • THỬ THÁCH</a:t>
             </a:r>
           </a:p>
         </p:txBody>
@@ -5555,21 +7112,107 @@
                 </a:solidFill>
                 <a:latin typeface="Arial"/>
               </a:rPr>
-              <a:t>Ghép đôi: Công việc ↔ Phần mềm</a:t>
-            </a:r>
-          </a:p>
-        </p:txBody>
-      </p:sp>
-      <p:sp>
-        <p:nvSpPr>
-          <p:cNvPr id="6" name="TextBox 5"/>
+              <a:t>Trò chơi: Ghép đôi công việc!</a:t>
+            </a:r>
+          </a:p>
+        </p:txBody>
+      </p:sp>
+      <p:sp>
+        <p:nvSpPr>
+          <p:cNvPr id="6" name="Rounded Rectangle 5"/>
+          <p:cNvSpPr/>
+          <p:nvPr/>
+        </p:nvSpPr>
+        <p:spPr>
+          <a:xfrm>
+            <a:off x="365760" y="2286000"/>
+            <a:ext cx="6400800" cy="3383279"/>
+          </a:xfrm>
+          <a:prstGeom prst="roundRect">
+            <a:avLst/>
+          </a:prstGeom>
+          <a:solidFill>
+            <a:srgbClr val="FFFFFF"/>
+          </a:solidFill>
+          <a:ln>
+            <a:noFill/>
+          </a:ln>
+        </p:spPr>
+        <p:style>
+          <a:lnRef idx="1">
+            <a:schemeClr val="accent1"/>
+          </a:lnRef>
+          <a:fillRef idx="3">
+            <a:schemeClr val="accent1"/>
+          </a:fillRef>
+          <a:effectRef idx="2">
+            <a:schemeClr val="accent1"/>
+          </a:effectRef>
+          <a:fontRef idx="minor">
+            <a:schemeClr val="lt1"/>
+          </a:fontRef>
+        </p:style>
+        <p:txBody>
+          <a:bodyPr rtlCol="0" anchor="ctr"/>
+          <a:lstStyle/>
+          <a:p>
+            <a:pPr algn="ctr"/>
+          </a:p>
+        </p:txBody>
+      </p:sp>
+      <p:sp>
+        <p:nvSpPr>
+          <p:cNvPr id="7" name="Rectangle 6"/>
+          <p:cNvSpPr/>
+          <p:nvPr/>
+        </p:nvSpPr>
+        <p:spPr>
+          <a:xfrm>
+            <a:off x="365760" y="2286000"/>
+            <a:ext cx="109728" cy="3383279"/>
+          </a:xfrm>
+          <a:prstGeom prst="rect">
+            <a:avLst/>
+          </a:prstGeom>
+          <a:solidFill>
+            <a:srgbClr val="EC4899"/>
+          </a:solidFill>
+          <a:ln>
+            <a:noFill/>
+          </a:ln>
+        </p:spPr>
+        <p:style>
+          <a:lnRef idx="1">
+            <a:schemeClr val="accent1"/>
+          </a:lnRef>
+          <a:fillRef idx="3">
+            <a:schemeClr val="accent1"/>
+          </a:fillRef>
+          <a:effectRef idx="2">
+            <a:schemeClr val="accent1"/>
+          </a:effectRef>
+          <a:fontRef idx="minor">
+            <a:schemeClr val="lt1"/>
+          </a:fontRef>
+        </p:style>
+        <p:txBody>
+          <a:bodyPr rtlCol="0" anchor="ctr"/>
+          <a:lstStyle/>
+          <a:p>
+            <a:pPr algn="ctr"/>
+          </a:p>
+        </p:txBody>
+      </p:sp>
+      <p:sp>
+        <p:nvSpPr>
+          <p:cNvPr id="8" name="TextBox 7"/>
           <p:cNvSpPr txBox="1"/>
           <p:nvPr/>
         </p:nvSpPr>
         <p:spPr>
           <a:xfrm>
-            <a:off x="457200" y="2286000"/>
-            <a:ext cx="11274552" cy="822960"/>
+            <a:off x="731520" y="2468880"/>
+            <a:ext cx="5852160" cy="3017520"/>
           </a:xfrm>
           <a:prstGeom prst="rect">
             <a:avLst/>
@@ -5588,344 +7231,48 @@
               </a:spcAft>
             </a:pPr>
             <a:r>
-              <a:rPr sz="1700" b="0">
+              <a:rPr sz="2000" b="0">
                 <a:solidFill>
                   <a:srgbClr val="831843"/>
                 </a:solidFill>
                 <a:latin typeface="Arial"/>
               </a:rPr>
-              <a:t>Nối công việc với phần mềm phù hợp:</a:t>
-            </a:r>
-          </a:p>
-        </p:txBody>
-      </p:sp>
-      <p:sp>
-        <p:nvSpPr>
-          <p:cNvPr id="7" name="Rounded Rectangle 6"/>
-          <p:cNvSpPr/>
-          <p:nvPr/>
-        </p:nvSpPr>
-        <p:spPr>
-          <a:xfrm>
-            <a:off x="457200" y="3200400"/>
-            <a:ext cx="5545836" cy="548639"/>
-          </a:xfrm>
-          <a:prstGeom prst="roundRect">
-            <a:avLst/>
-          </a:prstGeom>
-          <a:solidFill>
-            <a:srgbClr val="FFFFFF"/>
-          </a:solidFill>
-          <a:ln w="12700">
-            <a:solidFill>
-              <a:srgbClr val="EC4899"/>
-            </a:solidFill>
-          </a:ln>
-        </p:spPr>
-        <p:style>
-          <a:lnRef idx="1">
-            <a:schemeClr val="accent1"/>
-          </a:lnRef>
-          <a:fillRef idx="3">
-            <a:schemeClr val="accent1"/>
-          </a:fillRef>
-          <a:effectRef idx="2">
-            <a:schemeClr val="accent1"/>
-          </a:effectRef>
-          <a:fontRef idx="minor">
-            <a:schemeClr val="lt1"/>
-          </a:fontRef>
-        </p:style>
-        <p:txBody>
-          <a:bodyPr rtlCol="0" anchor="ctr"/>
-          <a:lstStyle/>
-          <a:p>
-            <a:pPr algn="ctr"/>
-          </a:p>
-        </p:txBody>
-      </p:sp>
-      <p:sp>
-        <p:nvSpPr>
-          <p:cNvPr id="8" name="TextBox 7"/>
-          <p:cNvSpPr txBox="1"/>
-          <p:nvPr/>
-        </p:nvSpPr>
-        <p:spPr>
-          <a:xfrm>
-            <a:off x="685800" y="3291840"/>
-            <a:ext cx="5180076" cy="365760"/>
-          </a:xfrm>
-          <a:prstGeom prst="rect">
-            <a:avLst/>
-          </a:prstGeom>
-          <a:noFill/>
-        </p:spPr>
-        <p:txBody>
-          <a:bodyPr wrap="square">
-            <a:spAutoFit/>
-          </a:bodyPr>
-          <a:lstStyle/>
-          <a:p>
-            <a:pPr algn="l"/>
-            <a:r>
-              <a:rPr sz="1500" b="0">
-                <a:solidFill>
-                  <a:srgbClr val="831843"/>
-                </a:solidFill>
-                <a:latin typeface="Arial"/>
-              </a:rPr>
-              <a:t>Viết bài văn ↔ Word</a:t>
-            </a:r>
-          </a:p>
-        </p:txBody>
-      </p:sp>
-      <p:sp>
-        <p:nvSpPr>
-          <p:cNvPr id="9" name="Rounded Rectangle 8"/>
-          <p:cNvSpPr/>
-          <p:nvPr/>
-        </p:nvSpPr>
-        <p:spPr>
-          <a:xfrm>
-            <a:off x="6185916" y="3200400"/>
-            <a:ext cx="5545836" cy="548639"/>
-          </a:xfrm>
-          <a:prstGeom prst="roundRect">
-            <a:avLst/>
-          </a:prstGeom>
-          <a:solidFill>
-            <a:srgbClr val="FFFFFF"/>
-          </a:solidFill>
-          <a:ln w="12700">
-            <a:solidFill>
-              <a:srgbClr val="EC4899"/>
-            </a:solidFill>
-          </a:ln>
-        </p:spPr>
-        <p:style>
-          <a:lnRef idx="1">
-            <a:schemeClr val="accent1"/>
-          </a:lnRef>
-          <a:fillRef idx="3">
-            <a:schemeClr val="accent1"/>
-          </a:fillRef>
-          <a:effectRef idx="2">
-            <a:schemeClr val="accent1"/>
-          </a:effectRef>
-          <a:fontRef idx="minor">
-            <a:schemeClr val="lt1"/>
-          </a:fontRef>
-        </p:style>
-        <p:txBody>
-          <a:bodyPr rtlCol="0" anchor="ctr"/>
-          <a:lstStyle/>
-          <a:p>
-            <a:pPr algn="ctr"/>
-          </a:p>
-        </p:txBody>
-      </p:sp>
-      <p:sp>
-        <p:nvSpPr>
-          <p:cNvPr id="10" name="TextBox 9"/>
-          <p:cNvSpPr txBox="1"/>
-          <p:nvPr/>
-        </p:nvSpPr>
-        <p:spPr>
-          <a:xfrm>
-            <a:off x="6414516" y="3291840"/>
-            <a:ext cx="5180076" cy="365760"/>
-          </a:xfrm>
-          <a:prstGeom prst="rect">
-            <a:avLst/>
-          </a:prstGeom>
-          <a:noFill/>
-        </p:spPr>
-        <p:txBody>
-          <a:bodyPr wrap="square">
-            <a:spAutoFit/>
-          </a:bodyPr>
-          <a:lstStyle/>
-          <a:p>
-            <a:pPr algn="l"/>
-            <a:r>
-              <a:rPr sz="1500" b="0">
-                <a:solidFill>
-                  <a:srgbClr val="831843"/>
-                </a:solidFill>
-                <a:latin typeface="Arial"/>
-              </a:rPr>
-              <a:t>Tính điểm TB ↔ Excel</a:t>
-            </a:r>
-          </a:p>
-        </p:txBody>
-      </p:sp>
-      <p:sp>
-        <p:nvSpPr>
-          <p:cNvPr id="11" name="Rounded Rectangle 10"/>
-          <p:cNvSpPr/>
-          <p:nvPr/>
-        </p:nvSpPr>
-        <p:spPr>
-          <a:xfrm>
-            <a:off x="457200" y="3886200"/>
-            <a:ext cx="5545836" cy="548639"/>
-          </a:xfrm>
-          <a:prstGeom prst="roundRect">
-            <a:avLst/>
-          </a:prstGeom>
-          <a:solidFill>
-            <a:srgbClr val="FFFFFF"/>
-          </a:solidFill>
-          <a:ln w="12700">
-            <a:solidFill>
-              <a:srgbClr val="EC4899"/>
-            </a:solidFill>
-          </a:ln>
-        </p:spPr>
-        <p:style>
-          <a:lnRef idx="1">
-            <a:schemeClr val="accent1"/>
-          </a:lnRef>
-          <a:fillRef idx="3">
-            <a:schemeClr val="accent1"/>
-          </a:fillRef>
-          <a:effectRef idx="2">
-            <a:schemeClr val="accent1"/>
-          </a:effectRef>
-          <a:fontRef idx="minor">
-            <a:schemeClr val="lt1"/>
-          </a:fontRef>
-        </p:style>
-        <p:txBody>
-          <a:bodyPr rtlCol="0" anchor="ctr"/>
-          <a:lstStyle/>
-          <a:p>
-            <a:pPr algn="ctr"/>
-          </a:p>
-        </p:txBody>
-      </p:sp>
-      <p:sp>
-        <p:nvSpPr>
-          <p:cNvPr id="12" name="TextBox 11"/>
-          <p:cNvSpPr txBox="1"/>
-          <p:nvPr/>
-        </p:nvSpPr>
-        <p:spPr>
-          <a:xfrm>
-            <a:off x="685800" y="3977639"/>
-            <a:ext cx="5180076" cy="365760"/>
-          </a:xfrm>
-          <a:prstGeom prst="rect">
-            <a:avLst/>
-          </a:prstGeom>
-          <a:noFill/>
-        </p:spPr>
-        <p:txBody>
-          <a:bodyPr wrap="square">
-            <a:spAutoFit/>
-          </a:bodyPr>
-          <a:lstStyle/>
-          <a:p>
-            <a:pPr algn="l"/>
-            <a:r>
-              <a:rPr sz="1500" b="0">
-                <a:solidFill>
-                  <a:srgbClr val="831843"/>
-                </a:solidFill>
-                <a:latin typeface="Arial"/>
-              </a:rPr>
-              <a:t>Làm bài trình bày ↔ PowerPoint</a:t>
-            </a:r>
-          </a:p>
-        </p:txBody>
-      </p:sp>
-      <p:sp>
-        <p:nvSpPr>
-          <p:cNvPr id="13" name="Rounded Rectangle 12"/>
-          <p:cNvSpPr/>
-          <p:nvPr/>
-        </p:nvSpPr>
-        <p:spPr>
-          <a:xfrm>
-            <a:off x="6185916" y="3886200"/>
-            <a:ext cx="5545836" cy="548639"/>
-          </a:xfrm>
-          <a:prstGeom prst="roundRect">
-            <a:avLst/>
-          </a:prstGeom>
-          <a:solidFill>
-            <a:srgbClr val="FFFFFF"/>
-          </a:solidFill>
-          <a:ln w="12700">
-            <a:solidFill>
-              <a:srgbClr val="EC4899"/>
-            </a:solidFill>
-          </a:ln>
-        </p:spPr>
-        <p:style>
-          <a:lnRef idx="1">
-            <a:schemeClr val="accent1"/>
-          </a:lnRef>
-          <a:fillRef idx="3">
-            <a:schemeClr val="accent1"/>
-          </a:fillRef>
-          <a:effectRef idx="2">
-            <a:schemeClr val="accent1"/>
-          </a:effectRef>
-          <a:fontRef idx="minor">
-            <a:schemeClr val="lt1"/>
-          </a:fontRef>
-        </p:style>
-        <p:txBody>
-          <a:bodyPr rtlCol="0" anchor="ctr"/>
-          <a:lstStyle/>
-          <a:p>
-            <a:pPr algn="ctr"/>
-          </a:p>
-        </p:txBody>
-      </p:sp>
-      <p:sp>
-        <p:nvSpPr>
-          <p:cNvPr id="14" name="TextBox 13"/>
-          <p:cNvSpPr txBox="1"/>
-          <p:nvPr/>
-        </p:nvSpPr>
-        <p:spPr>
-          <a:xfrm>
-            <a:off x="6414516" y="3977639"/>
-            <a:ext cx="5180076" cy="365760"/>
-          </a:xfrm>
-          <a:prstGeom prst="rect">
-            <a:avLst/>
-          </a:prstGeom>
-          <a:noFill/>
-        </p:spPr>
-        <p:txBody>
-          <a:bodyPr wrap="square">
-            <a:spAutoFit/>
-          </a:bodyPr>
-          <a:lstStyle/>
-          <a:p>
-            <a:pPr algn="l"/>
-            <a:r>
-              <a:rPr sz="1500" b="0">
-                <a:solidFill>
-                  <a:srgbClr val="831843"/>
-                </a:solidFill>
-                <a:latin typeface="Arial"/>
-              </a:rPr>
-              <a:t>Vẽ tranh ↔ Paint</a:t>
-            </a:r>
-          </a:p>
-        </p:txBody>
-      </p:sp>
+              <a:t>Nối công việc với phần mềm tương ứng:</a:t>
+            </a:r>
+          </a:p>
+        </p:txBody>
+      </p:sp>
+      <p:pic>
+        <p:nvPicPr>
+          <p:cNvPr id="9" name="Picture 8" descr="bai1_p10_img1.jpeg"/>
+          <p:cNvPicPr>
+            <a:picLocks noChangeAspect="1"/>
+          </p:cNvPicPr>
+          <p:nvPr/>
+        </p:nvPicPr>
+        <p:blipFill>
+          <a:blip r:embed="rId2"/>
+          <a:stretch>
+            <a:fillRect/>
+          </a:stretch>
+        </p:blipFill>
+        <p:spPr>
+          <a:xfrm>
+            <a:off x="7132320" y="2377440"/>
+            <a:ext cx="4572000" cy="3200399"/>
+          </a:xfrm>
+          <a:prstGeom prst="rect">
+            <a:avLst/>
+          </a:prstGeom>
+        </p:spPr>
+      </p:pic>
     </p:spTree>
   </p:cSld>
   <p:clrMapOvr>
     <a:masterClrMapping/>
   </p:clrMapOvr>
   <p:transition spd="med">
-    <p:wipe/>
+    <p:cover/>
   </p:transition>
 </p:sld>
 </file>
@@ -6241,8 +7588,8 @@
         </p:nvSpPr>
         <p:spPr>
           <a:xfrm>
-            <a:off x="1371600" y="2377440"/>
-            <a:ext cx="9445752" cy="457200"/>
+            <a:off x="1371600" y="2423160"/>
+            <a:ext cx="9445752" cy="365760"/>
           </a:xfrm>
           <a:prstGeom prst="rect">
             <a:avLst/>
@@ -6263,7 +7610,7 @@
                 </a:solidFill>
                 <a:latin typeface="Arial"/>
               </a:rPr>
-              <a:t>Máy tính làm được RẤT NHIỀU việc</a:t>
+              <a:t>Máy tính là công cụ đa năng trong học tập</a:t>
             </a:r>
           </a:p>
         </p:txBody>
@@ -6276,8 +7623,8 @@
         </p:nvSpPr>
         <p:spPr>
           <a:xfrm>
-            <a:off x="914400" y="3200400"/>
-            <a:ext cx="73152" cy="640080"/>
+            <a:off x="914400" y="3291840"/>
+            <a:ext cx="73152" cy="640079"/>
           </a:xfrm>
           <a:prstGeom prst="rect">
             <a:avLst/>
@@ -6319,8 +7666,8 @@
         </p:nvSpPr>
         <p:spPr>
           <a:xfrm>
-            <a:off x="1097280" y="3200400"/>
-            <a:ext cx="9994392" cy="640080"/>
+            <a:off x="1097280" y="3291840"/>
+            <a:ext cx="9994392" cy="640079"/>
           </a:xfrm>
           <a:prstGeom prst="roundRect">
             <a:avLst/>
@@ -6362,8 +7709,8 @@
         </p:nvSpPr>
         <p:spPr>
           <a:xfrm>
-            <a:off x="1371600" y="3291840"/>
-            <a:ext cx="9445752" cy="457200"/>
+            <a:off x="1371600" y="3429000"/>
+            <a:ext cx="9445752" cy="365760"/>
           </a:xfrm>
           <a:prstGeom prst="rect">
             <a:avLst/>
@@ -6384,7 +7731,7 @@
                 </a:solidFill>
                 <a:latin typeface="Arial"/>
               </a:rPr>
-              <a:t>Mỗi công việc có phần mềm phù hợp</a:t>
+              <a:t>Mỗi công việc ứng với phần mềm chuyên dụng</a:t>
             </a:r>
           </a:p>
         </p:txBody>
@@ -6397,7 +7744,7 @@
         </p:nvSpPr>
         <p:spPr>
           <a:xfrm>
-            <a:off x="914400" y="4114800"/>
+            <a:off x="914400" y="4297680"/>
             <a:ext cx="73152" cy="640080"/>
           </a:xfrm>
           <a:prstGeom prst="rect">
@@ -6440,7 +7787,7 @@
         </p:nvSpPr>
         <p:spPr>
           <a:xfrm>
-            <a:off x="1097280" y="4114800"/>
+            <a:off x="1097280" y="4297680"/>
             <a:ext cx="9994392" cy="640080"/>
           </a:xfrm>
           <a:prstGeom prst="roundRect">
@@ -6483,8 +7830,8 @@
         </p:nvSpPr>
         <p:spPr>
           <a:xfrm>
-            <a:off x="1371600" y="4206240"/>
-            <a:ext cx="9445752" cy="457200"/>
+            <a:off x="1371600" y="4434840"/>
+            <a:ext cx="9445752" cy="365760"/>
           </a:xfrm>
           <a:prstGeom prst="rect">
             <a:avLst/>
@@ -6505,7 +7852,7 @@
                 </a:solidFill>
                 <a:latin typeface="Arial"/>
               </a:rPr>
-              <a:t>Máy tính giúp ích trong mọi nghề nghiệp</a:t>
+              <a:t>Máy tính đóng vai trò quan trọng trong xã hội</a:t>
             </a:r>
           </a:p>
         </p:txBody>
@@ -6582,7 +7929,7 @@
         </p:nvSpPr>
         <p:spPr>
           <a:xfrm>
-            <a:off x="914400" y="1508760"/>
+            <a:off x="914400" y="1783080"/>
             <a:ext cx="10360152" cy="1097280"/>
           </a:xfrm>
           <a:prstGeom prst="rect">
@@ -6617,8 +7964,8 @@
         </p:nvSpPr>
         <p:spPr>
           <a:xfrm>
-            <a:off x="2436876" y="3063240"/>
-            <a:ext cx="7315200" cy="2285999"/>
+            <a:off x="2436876" y="3337560"/>
+            <a:ext cx="7315200" cy="1828800"/>
           </a:xfrm>
           <a:prstGeom prst="roundRect">
             <a:avLst/>
@@ -6660,8 +8007,8 @@
         </p:nvSpPr>
         <p:spPr>
           <a:xfrm>
-            <a:off x="2894076" y="3337560"/>
-            <a:ext cx="6400800" cy="1737360"/>
+            <a:off x="2894076" y="3611879"/>
+            <a:ext cx="6400800" cy="1280160"/>
           </a:xfrm>
           <a:prstGeom prst="rect">
             <a:avLst/>
@@ -6680,13 +8027,13 @@
               </a:spcAft>
             </a:pPr>
             <a:r>
-              <a:rPr sz="1800" b="0">
+              <a:rPr sz="2000" b="0">
                 <a:solidFill>
                   <a:srgbClr val="831843"/>
                 </a:solidFill>
                 <a:latin typeface="Arial"/>
               </a:rPr>
-              <a:t>BTVN: Hỏi 1 người lớn</a:t>
+              <a:t>BTVN: Hỏi 1 người lớn về công việc</a:t>
             </a:r>
           </a:p>
           <a:p>
@@ -6696,29 +8043,13 @@
               </a:spcAft>
             </a:pPr>
             <a:r>
-              <a:rPr sz="1800" b="0">
+              <a:rPr sz="2000" b="0">
                 <a:solidFill>
                   <a:srgbClr val="831843"/>
                 </a:solidFill>
                 <a:latin typeface="Arial"/>
               </a:rPr>
-              <a:t>họ dùng máy tính để làm gì?</a:t>
-            </a:r>
-          </a:p>
-          <a:p>
-            <a:pPr algn="ctr">
-              <a:spcAft>
-                <a:spcPts val="600"/>
-              </a:spcAft>
-            </a:pPr>
-            <a:r>
-              <a:rPr sz="1800" b="0">
-                <a:solidFill>
-                  <a:srgbClr val="831843"/>
-                </a:solidFill>
-                <a:latin typeface="Arial"/>
-              </a:rPr>
-              <a:t>Ghi lại vào vở nhé!</a:t>
+              <a:t>họ thực hiện trên máy tính hàng ngày!</a:t>
             </a:r>
           </a:p>
         </p:txBody>
